--- a/vehicleSchematic.pptx
+++ b/vehicleSchematic.pptx
@@ -104,6 +104,11 @@
       </a:defRPr>
     </a:lvl9pPr>
   </p:defaultTextStyle>
+  <p:extLst>
+    <p:ext uri="{EFAFB233-063F-42B5-8137-9DF3F51BA10A}">
+      <p15:sldGuideLst xmlns:p15="http://schemas.microsoft.com/office/powerpoint/2012/main"/>
+    </p:ext>
+  </p:extLst>
 </p:presentation>
 </file>
 
@@ -254,7 +259,7 @@
           <a:p>
             <a:fld id="{26C1F16C-3122-4B8D-BA78-F575EE24161A}" type="datetimeFigureOut">
               <a:rPr lang="en-US" smtClean="0"/>
-              <a:t>9/28/2026</a:t>
+              <a:t>10/1/2026</a:t>
             </a:fld>
             <a:endParaRPr lang="en-US"/>
           </a:p>
@@ -452,7 +457,7 @@
           <a:p>
             <a:fld id="{26C1F16C-3122-4B8D-BA78-F575EE24161A}" type="datetimeFigureOut">
               <a:rPr lang="en-US" smtClean="0"/>
-              <a:t>9/28/2026</a:t>
+              <a:t>10/1/2026</a:t>
             </a:fld>
             <a:endParaRPr lang="en-US"/>
           </a:p>
@@ -660,7 +665,7 @@
           <a:p>
             <a:fld id="{26C1F16C-3122-4B8D-BA78-F575EE24161A}" type="datetimeFigureOut">
               <a:rPr lang="en-US" smtClean="0"/>
-              <a:t>9/28/2026</a:t>
+              <a:t>10/1/2026</a:t>
             </a:fld>
             <a:endParaRPr lang="en-US"/>
           </a:p>
@@ -858,7 +863,7 @@
           <a:p>
             <a:fld id="{26C1F16C-3122-4B8D-BA78-F575EE24161A}" type="datetimeFigureOut">
               <a:rPr lang="en-US" smtClean="0"/>
-              <a:t>9/28/2026</a:t>
+              <a:t>10/1/2026</a:t>
             </a:fld>
             <a:endParaRPr lang="en-US"/>
           </a:p>
@@ -1133,7 +1138,7 @@
           <a:p>
             <a:fld id="{26C1F16C-3122-4B8D-BA78-F575EE24161A}" type="datetimeFigureOut">
               <a:rPr lang="en-US" smtClean="0"/>
-              <a:t>9/28/2026</a:t>
+              <a:t>10/1/2026</a:t>
             </a:fld>
             <a:endParaRPr lang="en-US"/>
           </a:p>
@@ -1398,7 +1403,7 @@
           <a:p>
             <a:fld id="{26C1F16C-3122-4B8D-BA78-F575EE24161A}" type="datetimeFigureOut">
               <a:rPr lang="en-US" smtClean="0"/>
-              <a:t>9/28/2026</a:t>
+              <a:t>10/1/2026</a:t>
             </a:fld>
             <a:endParaRPr lang="en-US"/>
           </a:p>
@@ -1810,7 +1815,7 @@
           <a:p>
             <a:fld id="{26C1F16C-3122-4B8D-BA78-F575EE24161A}" type="datetimeFigureOut">
               <a:rPr lang="en-US" smtClean="0"/>
-              <a:t>9/28/2026</a:t>
+              <a:t>10/1/2026</a:t>
             </a:fld>
             <a:endParaRPr lang="en-US"/>
           </a:p>
@@ -1951,7 +1956,7 @@
           <a:p>
             <a:fld id="{26C1F16C-3122-4B8D-BA78-F575EE24161A}" type="datetimeFigureOut">
               <a:rPr lang="en-US" smtClean="0"/>
-              <a:t>9/28/2026</a:t>
+              <a:t>10/1/2026</a:t>
             </a:fld>
             <a:endParaRPr lang="en-US"/>
           </a:p>
@@ -2064,7 +2069,7 @@
           <a:p>
             <a:fld id="{26C1F16C-3122-4B8D-BA78-F575EE24161A}" type="datetimeFigureOut">
               <a:rPr lang="en-US" smtClean="0"/>
-              <a:t>9/28/2026</a:t>
+              <a:t>10/1/2026</a:t>
             </a:fld>
             <a:endParaRPr lang="en-US"/>
           </a:p>
@@ -2375,7 +2380,7 @@
           <a:p>
             <a:fld id="{26C1F16C-3122-4B8D-BA78-F575EE24161A}" type="datetimeFigureOut">
               <a:rPr lang="en-US" smtClean="0"/>
-              <a:t>9/28/2026</a:t>
+              <a:t>10/1/2026</a:t>
             </a:fld>
             <a:endParaRPr lang="en-US"/>
           </a:p>
@@ -2663,7 +2668,7 @@
           <a:p>
             <a:fld id="{26C1F16C-3122-4B8D-BA78-F575EE24161A}" type="datetimeFigureOut">
               <a:rPr lang="en-US" smtClean="0"/>
-              <a:t>9/28/2026</a:t>
+              <a:t>10/1/2026</a:t>
             </a:fld>
             <a:endParaRPr lang="en-US"/>
           </a:p>
@@ -2904,7 +2909,7 @@
           <a:p>
             <a:fld id="{26C1F16C-3122-4B8D-BA78-F575EE24161A}" type="datetimeFigureOut">
               <a:rPr lang="en-US" smtClean="0"/>
-              <a:t>9/28/2026</a:t>
+              <a:t>10/1/2026</a:t>
             </a:fld>
             <a:endParaRPr lang="en-US"/>
           </a:p>
@@ -3321,6 +3326,1030 @@
           <a:chExt cx="0" cy="0"/>
         </a:xfrm>
       </p:grpSpPr>
+      <p:grpSp>
+        <p:nvGrpSpPr>
+          <p:cNvPr id="103" name="Group 102">
+            <a:extLst>
+              <a:ext uri="{FF2B5EF4-FFF2-40B4-BE49-F238E27FC236}">
+                <a16:creationId xmlns:a16="http://schemas.microsoft.com/office/drawing/2014/main" id="{5722B759-3613-37B4-43FC-5C1C0A8C7A65}"/>
+              </a:ext>
+            </a:extLst>
+          </p:cNvPr>
+          <p:cNvGrpSpPr/>
+          <p:nvPr/>
+        </p:nvGrpSpPr>
+        <p:grpSpPr>
+          <a:xfrm>
+            <a:off x="9082255" y="62514"/>
+            <a:ext cx="1540763" cy="1597891"/>
+            <a:chOff x="5057788" y="3149792"/>
+            <a:chExt cx="3142175" cy="3258680"/>
+          </a:xfrm>
+        </p:grpSpPr>
+        <p:sp>
+          <p:nvSpPr>
+            <p:cNvPr id="104" name="Rectangle 103">
+              <a:extLst>
+                <a:ext uri="{FF2B5EF4-FFF2-40B4-BE49-F238E27FC236}">
+                  <a16:creationId xmlns:a16="http://schemas.microsoft.com/office/drawing/2014/main" id="{5B68E7D9-E7A2-61C5-F789-1F92CC808F4C}"/>
+                </a:ext>
+              </a:extLst>
+            </p:cNvPr>
+            <p:cNvSpPr/>
+            <p:nvPr/>
+          </p:nvSpPr>
+          <p:spPr>
+            <a:xfrm>
+              <a:off x="5776907" y="3846786"/>
+              <a:ext cx="1703937" cy="2201182"/>
+            </a:xfrm>
+            <a:prstGeom prst="rect">
+              <a:avLst/>
+            </a:prstGeom>
+            <a:noFill/>
+            <a:ln w="38100"/>
+          </p:spPr>
+          <p:style>
+            <a:lnRef idx="2">
+              <a:schemeClr val="accent1">
+                <a:shade val="15000"/>
+              </a:schemeClr>
+            </a:lnRef>
+            <a:fillRef idx="1">
+              <a:schemeClr val="accent1"/>
+            </a:fillRef>
+            <a:effectRef idx="0">
+              <a:schemeClr val="accent1"/>
+            </a:effectRef>
+            <a:fontRef idx="minor">
+              <a:schemeClr val="lt1"/>
+            </a:fontRef>
+          </p:style>
+          <p:txBody>
+            <a:bodyPr rtlCol="0" anchor="ctr"/>
+            <a:lstStyle/>
+            <a:p>
+              <a:pPr algn="ctr"/>
+              <a:endParaRPr lang="en-US"/>
+            </a:p>
+          </p:txBody>
+        </p:sp>
+        <p:sp>
+          <p:nvSpPr>
+            <p:cNvPr id="105" name="Rectangle 104">
+              <a:extLst>
+                <a:ext uri="{FF2B5EF4-FFF2-40B4-BE49-F238E27FC236}">
+                  <a16:creationId xmlns:a16="http://schemas.microsoft.com/office/drawing/2014/main" id="{12ADA17D-1BB1-81CA-6548-A73A55286766}"/>
+                </a:ext>
+              </a:extLst>
+            </p:cNvPr>
+            <p:cNvSpPr/>
+            <p:nvPr/>
+          </p:nvSpPr>
+          <p:spPr>
+            <a:xfrm>
+              <a:off x="5057788" y="5410725"/>
+              <a:ext cx="719119" cy="997747"/>
+            </a:xfrm>
+            <a:prstGeom prst="rect">
+              <a:avLst/>
+            </a:prstGeom>
+            <a:noFill/>
+            <a:ln w="38100"/>
+          </p:spPr>
+          <p:style>
+            <a:lnRef idx="2">
+              <a:schemeClr val="accent1">
+                <a:shade val="15000"/>
+              </a:schemeClr>
+            </a:lnRef>
+            <a:fillRef idx="1">
+              <a:schemeClr val="accent1"/>
+            </a:fillRef>
+            <a:effectRef idx="0">
+              <a:schemeClr val="accent1"/>
+            </a:effectRef>
+            <a:fontRef idx="minor">
+              <a:schemeClr val="lt1"/>
+            </a:fontRef>
+          </p:style>
+          <p:txBody>
+            <a:bodyPr rtlCol="0" anchor="ctr"/>
+            <a:lstStyle/>
+            <a:p>
+              <a:pPr algn="ctr"/>
+              <a:endParaRPr lang="en-US"/>
+            </a:p>
+          </p:txBody>
+        </p:sp>
+        <p:sp>
+          <p:nvSpPr>
+            <p:cNvPr id="106" name="Rectangle 105">
+              <a:extLst>
+                <a:ext uri="{FF2B5EF4-FFF2-40B4-BE49-F238E27FC236}">
+                  <a16:creationId xmlns:a16="http://schemas.microsoft.com/office/drawing/2014/main" id="{543E1479-6E20-9A54-C6E3-4192BF883DB7}"/>
+                </a:ext>
+              </a:extLst>
+            </p:cNvPr>
+            <p:cNvSpPr/>
+            <p:nvPr/>
+          </p:nvSpPr>
+          <p:spPr>
+            <a:xfrm>
+              <a:off x="7480844" y="5410725"/>
+              <a:ext cx="719119" cy="997747"/>
+            </a:xfrm>
+            <a:prstGeom prst="rect">
+              <a:avLst/>
+            </a:prstGeom>
+            <a:noFill/>
+            <a:ln w="38100"/>
+          </p:spPr>
+          <p:style>
+            <a:lnRef idx="2">
+              <a:schemeClr val="accent1">
+                <a:shade val="15000"/>
+              </a:schemeClr>
+            </a:lnRef>
+            <a:fillRef idx="1">
+              <a:schemeClr val="accent1"/>
+            </a:fillRef>
+            <a:effectRef idx="0">
+              <a:schemeClr val="accent1"/>
+            </a:effectRef>
+            <a:fontRef idx="minor">
+              <a:schemeClr val="lt1"/>
+            </a:fontRef>
+          </p:style>
+          <p:txBody>
+            <a:bodyPr rtlCol="0" anchor="ctr"/>
+            <a:lstStyle/>
+            <a:p>
+              <a:pPr algn="ctr"/>
+              <a:endParaRPr lang="en-US"/>
+            </a:p>
+          </p:txBody>
+        </p:sp>
+        <p:cxnSp>
+          <p:nvCxnSpPr>
+            <p:cNvPr id="107" name="Connector: Elbow 106">
+              <a:extLst>
+                <a:ext uri="{FF2B5EF4-FFF2-40B4-BE49-F238E27FC236}">
+                  <a16:creationId xmlns:a16="http://schemas.microsoft.com/office/drawing/2014/main" id="{260D3F69-53CF-A113-9B0E-41FA94C9B873}"/>
+                </a:ext>
+              </a:extLst>
+            </p:cNvPr>
+            <p:cNvCxnSpPr>
+              <a:cxnSpLocks/>
+              <a:stCxn id="106" idx="1"/>
+            </p:cNvCxnSpPr>
+            <p:nvPr/>
+          </p:nvCxnSpPr>
+          <p:spPr>
+            <a:xfrm rot="10800000">
+              <a:off x="7089862" y="3846787"/>
+              <a:ext cx="390983" cy="2062813"/>
+            </a:xfrm>
+            <a:prstGeom prst="bentConnector2">
+              <a:avLst/>
+            </a:prstGeom>
+            <a:ln>
+              <a:solidFill>
+                <a:schemeClr val="tx1"/>
+              </a:solidFill>
+            </a:ln>
+          </p:spPr>
+          <p:style>
+            <a:lnRef idx="2">
+              <a:schemeClr val="accent1"/>
+            </a:lnRef>
+            <a:fillRef idx="0">
+              <a:schemeClr val="accent1"/>
+            </a:fillRef>
+            <a:effectRef idx="1">
+              <a:schemeClr val="accent1"/>
+            </a:effectRef>
+            <a:fontRef idx="minor">
+              <a:schemeClr val="tx1"/>
+            </a:fontRef>
+          </p:style>
+        </p:cxnSp>
+        <p:cxnSp>
+          <p:nvCxnSpPr>
+            <p:cNvPr id="108" name="Connector: Elbow 107">
+              <a:extLst>
+                <a:ext uri="{FF2B5EF4-FFF2-40B4-BE49-F238E27FC236}">
+                  <a16:creationId xmlns:a16="http://schemas.microsoft.com/office/drawing/2014/main" id="{FCB618D5-D7F4-598F-7004-744BABDF105D}"/>
+                </a:ext>
+              </a:extLst>
+            </p:cNvPr>
+            <p:cNvCxnSpPr>
+              <a:cxnSpLocks/>
+            </p:cNvCxnSpPr>
+            <p:nvPr/>
+          </p:nvCxnSpPr>
+          <p:spPr>
+            <a:xfrm rot="10800000">
+              <a:off x="5805077" y="3846786"/>
+              <a:ext cx="390983" cy="2062813"/>
+            </a:xfrm>
+            <a:prstGeom prst="bentConnector2">
+              <a:avLst/>
+            </a:prstGeom>
+            <a:ln>
+              <a:solidFill>
+                <a:schemeClr val="tx1"/>
+              </a:solidFill>
+            </a:ln>
+            <a:scene3d>
+              <a:camera prst="orthographicFront">
+                <a:rot lat="0" lon="10800000" rev="0"/>
+              </a:camera>
+              <a:lightRig rig="threePt" dir="t"/>
+            </a:scene3d>
+          </p:spPr>
+          <p:style>
+            <a:lnRef idx="2">
+              <a:schemeClr val="accent1"/>
+            </a:lnRef>
+            <a:fillRef idx="0">
+              <a:schemeClr val="accent1"/>
+            </a:fillRef>
+            <a:effectRef idx="1">
+              <a:schemeClr val="accent1"/>
+            </a:effectRef>
+            <a:fontRef idx="minor">
+              <a:schemeClr val="tx1"/>
+            </a:fontRef>
+          </p:style>
+        </p:cxnSp>
+        <p:sp>
+          <p:nvSpPr>
+            <p:cNvPr id="109" name="Right Bracket 108">
+              <a:extLst>
+                <a:ext uri="{FF2B5EF4-FFF2-40B4-BE49-F238E27FC236}">
+                  <a16:creationId xmlns:a16="http://schemas.microsoft.com/office/drawing/2014/main" id="{628E460F-6F3D-AED7-1709-A237688D7877}"/>
+                </a:ext>
+              </a:extLst>
+            </p:cNvPr>
+            <p:cNvSpPr/>
+            <p:nvPr/>
+          </p:nvSpPr>
+          <p:spPr>
+            <a:xfrm rot="5400000">
+              <a:off x="6810654" y="3156316"/>
+              <a:ext cx="558413" cy="545367"/>
+            </a:xfrm>
+            <a:prstGeom prst="rightBracket">
+              <a:avLst/>
+            </a:prstGeom>
+            <a:ln>
+              <a:solidFill>
+                <a:schemeClr val="tx1"/>
+              </a:solidFill>
+            </a:ln>
+          </p:spPr>
+          <p:style>
+            <a:lnRef idx="2">
+              <a:schemeClr val="accent1"/>
+            </a:lnRef>
+            <a:fillRef idx="0">
+              <a:schemeClr val="accent1"/>
+            </a:fillRef>
+            <a:effectRef idx="1">
+              <a:schemeClr val="accent1"/>
+            </a:effectRef>
+            <a:fontRef idx="minor">
+              <a:schemeClr val="tx1"/>
+            </a:fontRef>
+          </p:style>
+          <p:txBody>
+            <a:bodyPr rtlCol="0" anchor="ctr"/>
+            <a:lstStyle/>
+            <a:p>
+              <a:pPr algn="ctr"/>
+              <a:endParaRPr lang="en-US"/>
+            </a:p>
+          </p:txBody>
+        </p:sp>
+        <p:sp>
+          <p:nvSpPr>
+            <p:cNvPr id="110" name="Right Bracket 109">
+              <a:extLst>
+                <a:ext uri="{FF2B5EF4-FFF2-40B4-BE49-F238E27FC236}">
+                  <a16:creationId xmlns:a16="http://schemas.microsoft.com/office/drawing/2014/main" id="{BB867CE3-F5C2-CEBE-4F45-5D0D85352FD5}"/>
+                </a:ext>
+              </a:extLst>
+            </p:cNvPr>
+            <p:cNvSpPr/>
+            <p:nvPr/>
+          </p:nvSpPr>
+          <p:spPr>
+            <a:xfrm rot="5400000">
+              <a:off x="5916854" y="3156315"/>
+              <a:ext cx="558413" cy="545367"/>
+            </a:xfrm>
+            <a:prstGeom prst="rightBracket">
+              <a:avLst/>
+            </a:prstGeom>
+            <a:ln>
+              <a:solidFill>
+                <a:schemeClr val="tx1"/>
+              </a:solidFill>
+            </a:ln>
+          </p:spPr>
+          <p:style>
+            <a:lnRef idx="2">
+              <a:schemeClr val="accent1"/>
+            </a:lnRef>
+            <a:fillRef idx="0">
+              <a:schemeClr val="accent1"/>
+            </a:fillRef>
+            <a:effectRef idx="1">
+              <a:schemeClr val="accent1"/>
+            </a:effectRef>
+            <a:fontRef idx="minor">
+              <a:schemeClr val="tx1"/>
+            </a:fontRef>
+          </p:style>
+          <p:txBody>
+            <a:bodyPr rtlCol="0" anchor="ctr"/>
+            <a:lstStyle/>
+            <a:p>
+              <a:pPr algn="ctr"/>
+              <a:endParaRPr lang="en-US"/>
+            </a:p>
+          </p:txBody>
+        </p:sp>
+        <p:cxnSp>
+          <p:nvCxnSpPr>
+            <p:cNvPr id="111" name="Straight Connector 110">
+              <a:extLst>
+                <a:ext uri="{FF2B5EF4-FFF2-40B4-BE49-F238E27FC236}">
+                  <a16:creationId xmlns:a16="http://schemas.microsoft.com/office/drawing/2014/main" id="{DD9D5E0A-531F-4A1B-1BBE-59478038D358}"/>
+                </a:ext>
+              </a:extLst>
+            </p:cNvPr>
+            <p:cNvCxnSpPr>
+              <a:stCxn id="109" idx="2"/>
+            </p:cNvCxnSpPr>
+            <p:nvPr/>
+          </p:nvCxnSpPr>
+          <p:spPr>
+            <a:xfrm>
+              <a:off x="7089860" y="3708206"/>
+              <a:ext cx="0" cy="138580"/>
+            </a:xfrm>
+            <a:prstGeom prst="line">
+              <a:avLst/>
+            </a:prstGeom>
+            <a:ln>
+              <a:solidFill>
+                <a:schemeClr val="tx1"/>
+              </a:solidFill>
+            </a:ln>
+          </p:spPr>
+          <p:style>
+            <a:lnRef idx="2">
+              <a:schemeClr val="accent1"/>
+            </a:lnRef>
+            <a:fillRef idx="0">
+              <a:schemeClr val="accent1"/>
+            </a:fillRef>
+            <a:effectRef idx="1">
+              <a:schemeClr val="accent1"/>
+            </a:effectRef>
+            <a:fontRef idx="minor">
+              <a:schemeClr val="tx1"/>
+            </a:fontRef>
+          </p:style>
+        </p:cxnSp>
+        <p:cxnSp>
+          <p:nvCxnSpPr>
+            <p:cNvPr id="112" name="Straight Connector 111">
+              <a:extLst>
+                <a:ext uri="{FF2B5EF4-FFF2-40B4-BE49-F238E27FC236}">
+                  <a16:creationId xmlns:a16="http://schemas.microsoft.com/office/drawing/2014/main" id="{3AF3BFE3-EAA3-A5BC-80D2-FAF1EFAD3CFC}"/>
+                </a:ext>
+              </a:extLst>
+            </p:cNvPr>
+            <p:cNvCxnSpPr>
+              <a:cxnSpLocks/>
+            </p:cNvCxnSpPr>
+            <p:nvPr/>
+          </p:nvCxnSpPr>
+          <p:spPr>
+            <a:xfrm>
+              <a:off x="6182100" y="3708205"/>
+              <a:ext cx="0" cy="138581"/>
+            </a:xfrm>
+            <a:prstGeom prst="line">
+              <a:avLst/>
+            </a:prstGeom>
+            <a:ln>
+              <a:solidFill>
+                <a:schemeClr val="tx1"/>
+              </a:solidFill>
+            </a:ln>
+          </p:spPr>
+          <p:style>
+            <a:lnRef idx="2">
+              <a:schemeClr val="accent1"/>
+            </a:lnRef>
+            <a:fillRef idx="0">
+              <a:schemeClr val="accent1"/>
+            </a:fillRef>
+            <a:effectRef idx="1">
+              <a:schemeClr val="accent1"/>
+            </a:effectRef>
+            <a:fontRef idx="minor">
+              <a:schemeClr val="tx1"/>
+            </a:fontRef>
+          </p:style>
+        </p:cxnSp>
+        <p:sp>
+          <p:nvSpPr>
+            <p:cNvPr id="113" name="TextBox 112">
+              <a:extLst>
+                <a:ext uri="{FF2B5EF4-FFF2-40B4-BE49-F238E27FC236}">
+                  <a16:creationId xmlns:a16="http://schemas.microsoft.com/office/drawing/2014/main" id="{D1ACA088-A1AF-4E48-C7B0-15A06DBD993C}"/>
+                </a:ext>
+              </a:extLst>
+            </p:cNvPr>
+            <p:cNvSpPr txBox="1"/>
+            <p:nvPr/>
+          </p:nvSpPr>
+          <p:spPr>
+            <a:xfrm>
+              <a:off x="7006356" y="4639665"/>
+              <a:ext cx="356188" cy="477054"/>
+            </a:xfrm>
+            <a:prstGeom prst="rect">
+              <a:avLst/>
+            </a:prstGeom>
+            <a:noFill/>
+          </p:spPr>
+          <p:txBody>
+            <a:bodyPr wrap="none" rtlCol="0">
+              <a:spAutoFit/>
+            </a:bodyPr>
+            <a:lstStyle/>
+            <a:p>
+              <a:r>
+                <a:rPr lang="en-US" sz="2500" dirty="0"/>
+                <a:t>+</a:t>
+              </a:r>
+            </a:p>
+          </p:txBody>
+        </p:sp>
+        <p:sp>
+          <p:nvSpPr>
+            <p:cNvPr id="114" name="TextBox 113">
+              <a:extLst>
+                <a:ext uri="{FF2B5EF4-FFF2-40B4-BE49-F238E27FC236}">
+                  <a16:creationId xmlns:a16="http://schemas.microsoft.com/office/drawing/2014/main" id="{DC51A9A1-EAB9-2B5F-7810-858C5328DCE6}"/>
+                </a:ext>
+              </a:extLst>
+            </p:cNvPr>
+            <p:cNvSpPr txBox="1"/>
+            <p:nvPr/>
+          </p:nvSpPr>
+          <p:spPr>
+            <a:xfrm>
+              <a:off x="5903492" y="4637721"/>
+              <a:ext cx="356188" cy="477054"/>
+            </a:xfrm>
+            <a:prstGeom prst="rect">
+              <a:avLst/>
+            </a:prstGeom>
+            <a:noFill/>
+          </p:spPr>
+          <p:txBody>
+            <a:bodyPr wrap="none" rtlCol="0">
+              <a:spAutoFit/>
+            </a:bodyPr>
+            <a:lstStyle/>
+            <a:p>
+              <a:r>
+                <a:rPr lang="en-US" sz="2500" dirty="0"/>
+                <a:t>+</a:t>
+              </a:r>
+            </a:p>
+          </p:txBody>
+        </p:sp>
+      </p:grpSp>
+      <p:grpSp>
+        <p:nvGrpSpPr>
+          <p:cNvPr id="87" name="Group 86">
+            <a:extLst>
+              <a:ext uri="{FF2B5EF4-FFF2-40B4-BE49-F238E27FC236}">
+                <a16:creationId xmlns:a16="http://schemas.microsoft.com/office/drawing/2014/main" id="{EEA6D5E4-850A-0CEA-B294-31C2D19B02E3}"/>
+              </a:ext>
+            </a:extLst>
+          </p:cNvPr>
+          <p:cNvGrpSpPr/>
+          <p:nvPr/>
+        </p:nvGrpSpPr>
+        <p:grpSpPr>
+          <a:xfrm>
+            <a:off x="1568983" y="69035"/>
+            <a:ext cx="1540763" cy="1597891"/>
+            <a:chOff x="5057788" y="3149792"/>
+            <a:chExt cx="3142175" cy="3258680"/>
+          </a:xfrm>
+        </p:grpSpPr>
+        <p:sp>
+          <p:nvSpPr>
+            <p:cNvPr id="88" name="Rectangle 87">
+              <a:extLst>
+                <a:ext uri="{FF2B5EF4-FFF2-40B4-BE49-F238E27FC236}">
+                  <a16:creationId xmlns:a16="http://schemas.microsoft.com/office/drawing/2014/main" id="{7279CD9F-89FB-DDAD-F696-E2491DB40DF7}"/>
+                </a:ext>
+              </a:extLst>
+            </p:cNvPr>
+            <p:cNvSpPr/>
+            <p:nvPr/>
+          </p:nvSpPr>
+          <p:spPr>
+            <a:xfrm>
+              <a:off x="5776907" y="3846786"/>
+              <a:ext cx="1703937" cy="2201182"/>
+            </a:xfrm>
+            <a:prstGeom prst="rect">
+              <a:avLst/>
+            </a:prstGeom>
+            <a:noFill/>
+            <a:ln w="38100"/>
+          </p:spPr>
+          <p:style>
+            <a:lnRef idx="2">
+              <a:schemeClr val="accent1">
+                <a:shade val="15000"/>
+              </a:schemeClr>
+            </a:lnRef>
+            <a:fillRef idx="1">
+              <a:schemeClr val="accent1"/>
+            </a:fillRef>
+            <a:effectRef idx="0">
+              <a:schemeClr val="accent1"/>
+            </a:effectRef>
+            <a:fontRef idx="minor">
+              <a:schemeClr val="lt1"/>
+            </a:fontRef>
+          </p:style>
+          <p:txBody>
+            <a:bodyPr rtlCol="0" anchor="ctr"/>
+            <a:lstStyle/>
+            <a:p>
+              <a:pPr algn="ctr"/>
+              <a:endParaRPr lang="en-US"/>
+            </a:p>
+          </p:txBody>
+        </p:sp>
+        <p:sp>
+          <p:nvSpPr>
+            <p:cNvPr id="89" name="Rectangle 88">
+              <a:extLst>
+                <a:ext uri="{FF2B5EF4-FFF2-40B4-BE49-F238E27FC236}">
+                  <a16:creationId xmlns:a16="http://schemas.microsoft.com/office/drawing/2014/main" id="{5B2F842F-8CF6-B580-DDF4-1C7D6BAB4128}"/>
+                </a:ext>
+              </a:extLst>
+            </p:cNvPr>
+            <p:cNvSpPr/>
+            <p:nvPr/>
+          </p:nvSpPr>
+          <p:spPr>
+            <a:xfrm>
+              <a:off x="5057788" y="5410725"/>
+              <a:ext cx="719119" cy="997747"/>
+            </a:xfrm>
+            <a:prstGeom prst="rect">
+              <a:avLst/>
+            </a:prstGeom>
+            <a:noFill/>
+            <a:ln w="38100"/>
+          </p:spPr>
+          <p:style>
+            <a:lnRef idx="2">
+              <a:schemeClr val="accent1">
+                <a:shade val="15000"/>
+              </a:schemeClr>
+            </a:lnRef>
+            <a:fillRef idx="1">
+              <a:schemeClr val="accent1"/>
+            </a:fillRef>
+            <a:effectRef idx="0">
+              <a:schemeClr val="accent1"/>
+            </a:effectRef>
+            <a:fontRef idx="minor">
+              <a:schemeClr val="lt1"/>
+            </a:fontRef>
+          </p:style>
+          <p:txBody>
+            <a:bodyPr rtlCol="0" anchor="ctr"/>
+            <a:lstStyle/>
+            <a:p>
+              <a:pPr algn="ctr"/>
+              <a:endParaRPr lang="en-US"/>
+            </a:p>
+          </p:txBody>
+        </p:sp>
+        <p:sp>
+          <p:nvSpPr>
+            <p:cNvPr id="90" name="Rectangle 89">
+              <a:extLst>
+                <a:ext uri="{FF2B5EF4-FFF2-40B4-BE49-F238E27FC236}">
+                  <a16:creationId xmlns:a16="http://schemas.microsoft.com/office/drawing/2014/main" id="{FF629309-E6AE-3437-BD3C-BC64F47EC95E}"/>
+                </a:ext>
+              </a:extLst>
+            </p:cNvPr>
+            <p:cNvSpPr/>
+            <p:nvPr/>
+          </p:nvSpPr>
+          <p:spPr>
+            <a:xfrm>
+              <a:off x="7480844" y="5410725"/>
+              <a:ext cx="719119" cy="997747"/>
+            </a:xfrm>
+            <a:prstGeom prst="rect">
+              <a:avLst/>
+            </a:prstGeom>
+            <a:noFill/>
+            <a:ln w="38100"/>
+          </p:spPr>
+          <p:style>
+            <a:lnRef idx="2">
+              <a:schemeClr val="accent1">
+                <a:shade val="15000"/>
+              </a:schemeClr>
+            </a:lnRef>
+            <a:fillRef idx="1">
+              <a:schemeClr val="accent1"/>
+            </a:fillRef>
+            <a:effectRef idx="0">
+              <a:schemeClr val="accent1"/>
+            </a:effectRef>
+            <a:fontRef idx="minor">
+              <a:schemeClr val="lt1"/>
+            </a:fontRef>
+          </p:style>
+          <p:txBody>
+            <a:bodyPr rtlCol="0" anchor="ctr"/>
+            <a:lstStyle/>
+            <a:p>
+              <a:pPr algn="ctr"/>
+              <a:endParaRPr lang="en-US"/>
+            </a:p>
+          </p:txBody>
+        </p:sp>
+        <p:cxnSp>
+          <p:nvCxnSpPr>
+            <p:cNvPr id="91" name="Connector: Elbow 90">
+              <a:extLst>
+                <a:ext uri="{FF2B5EF4-FFF2-40B4-BE49-F238E27FC236}">
+                  <a16:creationId xmlns:a16="http://schemas.microsoft.com/office/drawing/2014/main" id="{D3958761-FD69-8C11-DA57-AD66C9F8D301}"/>
+                </a:ext>
+              </a:extLst>
+            </p:cNvPr>
+            <p:cNvCxnSpPr>
+              <a:cxnSpLocks/>
+              <a:stCxn id="90" idx="1"/>
+            </p:cNvCxnSpPr>
+            <p:nvPr/>
+          </p:nvCxnSpPr>
+          <p:spPr>
+            <a:xfrm rot="10800000">
+              <a:off x="7089862" y="3846787"/>
+              <a:ext cx="390983" cy="2062813"/>
+            </a:xfrm>
+            <a:prstGeom prst="bentConnector2">
+              <a:avLst/>
+            </a:prstGeom>
+            <a:ln>
+              <a:solidFill>
+                <a:schemeClr val="tx1"/>
+              </a:solidFill>
+            </a:ln>
+          </p:spPr>
+          <p:style>
+            <a:lnRef idx="2">
+              <a:schemeClr val="accent1"/>
+            </a:lnRef>
+            <a:fillRef idx="0">
+              <a:schemeClr val="accent1"/>
+            </a:fillRef>
+            <a:effectRef idx="1">
+              <a:schemeClr val="accent1"/>
+            </a:effectRef>
+            <a:fontRef idx="minor">
+              <a:schemeClr val="tx1"/>
+            </a:fontRef>
+          </p:style>
+        </p:cxnSp>
+        <p:cxnSp>
+          <p:nvCxnSpPr>
+            <p:cNvPr id="92" name="Connector: Elbow 91">
+              <a:extLst>
+                <a:ext uri="{FF2B5EF4-FFF2-40B4-BE49-F238E27FC236}">
+                  <a16:creationId xmlns:a16="http://schemas.microsoft.com/office/drawing/2014/main" id="{3FD9DC7A-4260-10DA-F3B7-FB460425AEB2}"/>
+                </a:ext>
+              </a:extLst>
+            </p:cNvPr>
+            <p:cNvCxnSpPr>
+              <a:cxnSpLocks/>
+            </p:cNvCxnSpPr>
+            <p:nvPr/>
+          </p:nvCxnSpPr>
+          <p:spPr>
+            <a:xfrm rot="10800000">
+              <a:off x="5805077" y="3846786"/>
+              <a:ext cx="390983" cy="2062813"/>
+            </a:xfrm>
+            <a:prstGeom prst="bentConnector2">
+              <a:avLst/>
+            </a:prstGeom>
+            <a:ln>
+              <a:solidFill>
+                <a:schemeClr val="tx1"/>
+              </a:solidFill>
+            </a:ln>
+            <a:scene3d>
+              <a:camera prst="orthographicFront">
+                <a:rot lat="0" lon="10800000" rev="0"/>
+              </a:camera>
+              <a:lightRig rig="threePt" dir="t"/>
+            </a:scene3d>
+          </p:spPr>
+          <p:style>
+            <a:lnRef idx="2">
+              <a:schemeClr val="accent1"/>
+            </a:lnRef>
+            <a:fillRef idx="0">
+              <a:schemeClr val="accent1"/>
+            </a:fillRef>
+            <a:effectRef idx="1">
+              <a:schemeClr val="accent1"/>
+            </a:effectRef>
+            <a:fontRef idx="minor">
+              <a:schemeClr val="tx1"/>
+            </a:fontRef>
+          </p:style>
+        </p:cxnSp>
+        <p:sp>
+          <p:nvSpPr>
+            <p:cNvPr id="93" name="Right Bracket 92">
+              <a:extLst>
+                <a:ext uri="{FF2B5EF4-FFF2-40B4-BE49-F238E27FC236}">
+                  <a16:creationId xmlns:a16="http://schemas.microsoft.com/office/drawing/2014/main" id="{38E0CAE3-BDA1-D0B5-146F-FFD1EC5D28BE}"/>
+                </a:ext>
+              </a:extLst>
+            </p:cNvPr>
+            <p:cNvSpPr/>
+            <p:nvPr/>
+          </p:nvSpPr>
+          <p:spPr>
+            <a:xfrm rot="5400000">
+              <a:off x="6810654" y="3156316"/>
+              <a:ext cx="558413" cy="545367"/>
+            </a:xfrm>
+            <a:prstGeom prst="rightBracket">
+              <a:avLst/>
+            </a:prstGeom>
+            <a:ln>
+              <a:solidFill>
+                <a:schemeClr val="tx1"/>
+              </a:solidFill>
+            </a:ln>
+          </p:spPr>
+          <p:style>
+            <a:lnRef idx="2">
+              <a:schemeClr val="accent1"/>
+            </a:lnRef>
+            <a:fillRef idx="0">
+              <a:schemeClr val="accent1"/>
+            </a:fillRef>
+            <a:effectRef idx="1">
+              <a:schemeClr val="accent1"/>
+            </a:effectRef>
+            <a:fontRef idx="minor">
+              <a:schemeClr val="tx1"/>
+            </a:fontRef>
+          </p:style>
+          <p:txBody>
+            <a:bodyPr rtlCol="0" anchor="ctr"/>
+            <a:lstStyle/>
+            <a:p>
+              <a:pPr algn="ctr"/>
+              <a:endParaRPr lang="en-US"/>
+            </a:p>
+          </p:txBody>
+        </p:sp>
+        <p:sp>
+          <p:nvSpPr>
+            <p:cNvPr id="94" name="Right Bracket 93">
+              <a:extLst>
+                <a:ext uri="{FF2B5EF4-FFF2-40B4-BE49-F238E27FC236}">
+                  <a16:creationId xmlns:a16="http://schemas.microsoft.com/office/drawing/2014/main" id="{A722C78C-9BEF-B07F-A257-490A0B9BAB82}"/>
+                </a:ext>
+              </a:extLst>
+            </p:cNvPr>
+            <p:cNvSpPr/>
+            <p:nvPr/>
+          </p:nvSpPr>
+          <p:spPr>
+            <a:xfrm rot="5400000">
+              <a:off x="5916854" y="3156315"/>
+              <a:ext cx="558413" cy="545367"/>
+            </a:xfrm>
+            <a:prstGeom prst="rightBracket">
+              <a:avLst/>
+            </a:prstGeom>
+            <a:ln>
+              <a:solidFill>
+                <a:schemeClr val="tx1"/>
+              </a:solidFill>
+            </a:ln>
+          </p:spPr>
+          <p:style>
+            <a:lnRef idx="2">
+              <a:schemeClr val="accent1"/>
+            </a:lnRef>
+            <a:fillRef idx="0">
+              <a:schemeClr val="accent1"/>
+            </a:fillRef>
+            <a:effectRef idx="1">
+              <a:schemeClr val="accent1"/>
+            </a:effectRef>
+            <a:fontRef idx="minor">
+              <a:schemeClr val="tx1"/>
+            </a:fontRef>
+          </p:style>
+          <p:txBody>
+            <a:bodyPr rtlCol="0" anchor="ctr"/>
+            <a:lstStyle/>
+            <a:p>
+              <a:pPr algn="ctr"/>
+              <a:endParaRPr lang="en-US"/>
+            </a:p>
+          </p:txBody>
+        </p:sp>
+        <p:cxnSp>
+          <p:nvCxnSpPr>
+            <p:cNvPr id="95" name="Straight Connector 94">
+              <a:extLst>
+                <a:ext uri="{FF2B5EF4-FFF2-40B4-BE49-F238E27FC236}">
+                  <a16:creationId xmlns:a16="http://schemas.microsoft.com/office/drawing/2014/main" id="{40ABD3FF-2B9C-4D59-3A8E-06AEA73A4A36}"/>
+                </a:ext>
+              </a:extLst>
+            </p:cNvPr>
+            <p:cNvCxnSpPr>
+              <a:stCxn id="93" idx="2"/>
+            </p:cNvCxnSpPr>
+            <p:nvPr/>
+          </p:nvCxnSpPr>
+          <p:spPr>
+            <a:xfrm>
+              <a:off x="7089860" y="3708206"/>
+              <a:ext cx="0" cy="138580"/>
+            </a:xfrm>
+            <a:prstGeom prst="line">
+              <a:avLst/>
+            </a:prstGeom>
+            <a:ln>
+              <a:solidFill>
+                <a:schemeClr val="tx1"/>
+              </a:solidFill>
+            </a:ln>
+          </p:spPr>
+          <p:style>
+            <a:lnRef idx="2">
+              <a:schemeClr val="accent1"/>
+            </a:lnRef>
+            <a:fillRef idx="0">
+              <a:schemeClr val="accent1"/>
+            </a:fillRef>
+            <a:effectRef idx="1">
+              <a:schemeClr val="accent1"/>
+            </a:effectRef>
+            <a:fontRef idx="minor">
+              <a:schemeClr val="tx1"/>
+            </a:fontRef>
+          </p:style>
+        </p:cxnSp>
+        <p:cxnSp>
+          <p:nvCxnSpPr>
+            <p:cNvPr id="96" name="Straight Connector 95">
+              <a:extLst>
+                <a:ext uri="{FF2B5EF4-FFF2-40B4-BE49-F238E27FC236}">
+                  <a16:creationId xmlns:a16="http://schemas.microsoft.com/office/drawing/2014/main" id="{D2C3B4CB-8793-7B39-F039-0CDE41717D59}"/>
+                </a:ext>
+              </a:extLst>
+            </p:cNvPr>
+            <p:cNvCxnSpPr>
+              <a:cxnSpLocks/>
+            </p:cNvCxnSpPr>
+            <p:nvPr/>
+          </p:nvCxnSpPr>
+          <p:spPr>
+            <a:xfrm>
+              <a:off x="6182100" y="3708205"/>
+              <a:ext cx="0" cy="138581"/>
+            </a:xfrm>
+            <a:prstGeom prst="line">
+              <a:avLst/>
+            </a:prstGeom>
+            <a:ln>
+              <a:solidFill>
+                <a:schemeClr val="tx1"/>
+              </a:solidFill>
+            </a:ln>
+          </p:spPr>
+          <p:style>
+            <a:lnRef idx="2">
+              <a:schemeClr val="accent1"/>
+            </a:lnRef>
+            <a:fillRef idx="0">
+              <a:schemeClr val="accent1"/>
+            </a:fillRef>
+            <a:effectRef idx="1">
+              <a:schemeClr val="accent1"/>
+            </a:effectRef>
+            <a:fontRef idx="minor">
+              <a:schemeClr val="tx1"/>
+            </a:fontRef>
+          </p:style>
+        </p:cxnSp>
+        <p:sp>
+          <p:nvSpPr>
+            <p:cNvPr id="97" name="TextBox 96">
+              <a:extLst>
+                <a:ext uri="{FF2B5EF4-FFF2-40B4-BE49-F238E27FC236}">
+                  <a16:creationId xmlns:a16="http://schemas.microsoft.com/office/drawing/2014/main" id="{9F7790FB-0B65-D0FD-BB1E-431389B585BD}"/>
+                </a:ext>
+              </a:extLst>
+            </p:cNvPr>
+            <p:cNvSpPr txBox="1"/>
+            <p:nvPr/>
+          </p:nvSpPr>
+          <p:spPr>
+            <a:xfrm>
+              <a:off x="7006356" y="4639665"/>
+              <a:ext cx="356188" cy="477054"/>
+            </a:xfrm>
+            <a:prstGeom prst="rect">
+              <a:avLst/>
+            </a:prstGeom>
+            <a:noFill/>
+          </p:spPr>
+          <p:txBody>
+            <a:bodyPr wrap="none" rtlCol="0">
+              <a:spAutoFit/>
+            </a:bodyPr>
+            <a:lstStyle/>
+            <a:p>
+              <a:r>
+                <a:rPr lang="en-US" sz="2500" dirty="0"/>
+                <a:t>+</a:t>
+              </a:r>
+            </a:p>
+          </p:txBody>
+        </p:sp>
+        <p:sp>
+          <p:nvSpPr>
+            <p:cNvPr id="98" name="TextBox 97">
+              <a:extLst>
+                <a:ext uri="{FF2B5EF4-FFF2-40B4-BE49-F238E27FC236}">
+                  <a16:creationId xmlns:a16="http://schemas.microsoft.com/office/drawing/2014/main" id="{747AD32A-D19A-8B33-FCC7-87154DD8399C}"/>
+                </a:ext>
+              </a:extLst>
+            </p:cNvPr>
+            <p:cNvSpPr txBox="1"/>
+            <p:nvPr/>
+          </p:nvSpPr>
+          <p:spPr>
+            <a:xfrm>
+              <a:off x="5903492" y="4637721"/>
+              <a:ext cx="356188" cy="477054"/>
+            </a:xfrm>
+            <a:prstGeom prst="rect">
+              <a:avLst/>
+            </a:prstGeom>
+            <a:noFill/>
+          </p:spPr>
+          <p:txBody>
+            <a:bodyPr wrap="none" rtlCol="0">
+              <a:spAutoFit/>
+            </a:bodyPr>
+            <a:lstStyle/>
+            <a:p>
+              <a:r>
+                <a:rPr lang="en-US" sz="2500" dirty="0"/>
+                <a:t>+</a:t>
+              </a:r>
+            </a:p>
+          </p:txBody>
+        </p:sp>
+      </p:grpSp>
       <p:sp>
         <p:nvSpPr>
           <p:cNvPr id="12" name="Rectangle 11">
@@ -3335,14 +4364,14 @@
         </p:nvSpPr>
         <p:spPr>
           <a:xfrm>
-            <a:off x="4425696" y="2734056"/>
-            <a:ext cx="1670304" cy="1920240"/>
+            <a:off x="1568983" y="3846786"/>
+            <a:ext cx="1703937" cy="2201182"/>
           </a:xfrm>
           <a:prstGeom prst="rect">
             <a:avLst/>
           </a:prstGeom>
           <a:noFill/>
-          <a:ln w="57150"/>
+          <a:ln w="38100"/>
         </p:spPr>
         <p:style>
           <a:lnRef idx="2">
@@ -3358,6 +4387,1303 @@
           </a:effectRef>
           <a:fontRef idx="minor">
             <a:schemeClr val="lt1"/>
+          </a:fontRef>
+        </p:style>
+        <p:txBody>
+          <a:bodyPr rtlCol="0" anchor="ctr"/>
+          <a:lstStyle/>
+          <a:p>
+            <a:pPr algn="ctr"/>
+            <a:endParaRPr lang="en-US"/>
+          </a:p>
+        </p:txBody>
+      </p:sp>
+      <p:sp>
+        <p:nvSpPr>
+          <p:cNvPr id="3" name="Rectangle 2">
+            <a:extLst>
+              <a:ext uri="{FF2B5EF4-FFF2-40B4-BE49-F238E27FC236}">
+                <a16:creationId xmlns:a16="http://schemas.microsoft.com/office/drawing/2014/main" id="{7D8024E0-A970-1FF4-218A-EA7186B2CFAA}"/>
+              </a:ext>
+            </a:extLst>
+          </p:cNvPr>
+          <p:cNvSpPr/>
+          <p:nvPr/>
+        </p:nvSpPr>
+        <p:spPr>
+          <a:xfrm>
+            <a:off x="849864" y="5410725"/>
+            <a:ext cx="719119" cy="997747"/>
+          </a:xfrm>
+          <a:prstGeom prst="rect">
+            <a:avLst/>
+          </a:prstGeom>
+          <a:noFill/>
+          <a:ln w="38100"/>
+        </p:spPr>
+        <p:style>
+          <a:lnRef idx="2">
+            <a:schemeClr val="accent1">
+              <a:shade val="15000"/>
+            </a:schemeClr>
+          </a:lnRef>
+          <a:fillRef idx="1">
+            <a:schemeClr val="accent1"/>
+          </a:fillRef>
+          <a:effectRef idx="0">
+            <a:schemeClr val="accent1"/>
+          </a:effectRef>
+          <a:fontRef idx="minor">
+            <a:schemeClr val="lt1"/>
+          </a:fontRef>
+        </p:style>
+        <p:txBody>
+          <a:bodyPr rtlCol="0" anchor="ctr"/>
+          <a:lstStyle/>
+          <a:p>
+            <a:pPr algn="ctr"/>
+            <a:endParaRPr lang="en-US"/>
+          </a:p>
+        </p:txBody>
+      </p:sp>
+      <p:sp>
+        <p:nvSpPr>
+          <p:cNvPr id="5" name="Rectangle 4">
+            <a:extLst>
+              <a:ext uri="{FF2B5EF4-FFF2-40B4-BE49-F238E27FC236}">
+                <a16:creationId xmlns:a16="http://schemas.microsoft.com/office/drawing/2014/main" id="{955B0DB5-306B-7594-8CFD-AB1EA250137E}"/>
+              </a:ext>
+            </a:extLst>
+          </p:cNvPr>
+          <p:cNvSpPr/>
+          <p:nvPr/>
+        </p:nvSpPr>
+        <p:spPr>
+          <a:xfrm>
+            <a:off x="3272920" y="5410725"/>
+            <a:ext cx="719119" cy="997747"/>
+          </a:xfrm>
+          <a:prstGeom prst="rect">
+            <a:avLst/>
+          </a:prstGeom>
+          <a:noFill/>
+          <a:ln w="38100"/>
+        </p:spPr>
+        <p:style>
+          <a:lnRef idx="2">
+            <a:schemeClr val="accent1">
+              <a:shade val="15000"/>
+            </a:schemeClr>
+          </a:lnRef>
+          <a:fillRef idx="1">
+            <a:schemeClr val="accent1"/>
+          </a:fillRef>
+          <a:effectRef idx="0">
+            <a:schemeClr val="accent1"/>
+          </a:effectRef>
+          <a:fontRef idx="minor">
+            <a:schemeClr val="lt1"/>
+          </a:fontRef>
+        </p:style>
+        <p:txBody>
+          <a:bodyPr rtlCol="0" anchor="ctr"/>
+          <a:lstStyle/>
+          <a:p>
+            <a:pPr algn="ctr"/>
+            <a:endParaRPr lang="en-US"/>
+          </a:p>
+        </p:txBody>
+      </p:sp>
+      <p:cxnSp>
+        <p:nvCxnSpPr>
+          <p:cNvPr id="7" name="Connector: Elbow 6">
+            <a:extLst>
+              <a:ext uri="{FF2B5EF4-FFF2-40B4-BE49-F238E27FC236}">
+                <a16:creationId xmlns:a16="http://schemas.microsoft.com/office/drawing/2014/main" id="{2504BD6B-70BB-E7A4-8043-91D423D11191}"/>
+              </a:ext>
+            </a:extLst>
+          </p:cNvPr>
+          <p:cNvCxnSpPr>
+            <a:cxnSpLocks/>
+            <a:stCxn id="5" idx="1"/>
+          </p:cNvCxnSpPr>
+          <p:nvPr/>
+        </p:nvCxnSpPr>
+        <p:spPr>
+          <a:xfrm rot="10800000">
+            <a:off x="2881938" y="3846787"/>
+            <a:ext cx="390983" cy="2062813"/>
+          </a:xfrm>
+          <a:prstGeom prst="bentConnector2">
+            <a:avLst/>
+          </a:prstGeom>
+          <a:ln>
+            <a:solidFill>
+              <a:schemeClr val="tx1"/>
+            </a:solidFill>
+          </a:ln>
+        </p:spPr>
+        <p:style>
+          <a:lnRef idx="2">
+            <a:schemeClr val="accent1"/>
+          </a:lnRef>
+          <a:fillRef idx="0">
+            <a:schemeClr val="accent1"/>
+          </a:fillRef>
+          <a:effectRef idx="1">
+            <a:schemeClr val="accent1"/>
+          </a:effectRef>
+          <a:fontRef idx="minor">
+            <a:schemeClr val="tx1"/>
+          </a:fontRef>
+        </p:style>
+      </p:cxnSp>
+      <p:cxnSp>
+        <p:nvCxnSpPr>
+          <p:cNvPr id="14" name="Connector: Elbow 13">
+            <a:extLst>
+              <a:ext uri="{FF2B5EF4-FFF2-40B4-BE49-F238E27FC236}">
+                <a16:creationId xmlns:a16="http://schemas.microsoft.com/office/drawing/2014/main" id="{DDE3A59D-93F6-ED7F-E8E7-FEFF9BCC33B5}"/>
+              </a:ext>
+            </a:extLst>
+          </p:cNvPr>
+          <p:cNvCxnSpPr>
+            <a:cxnSpLocks/>
+          </p:cNvCxnSpPr>
+          <p:nvPr/>
+        </p:nvCxnSpPr>
+        <p:spPr>
+          <a:xfrm rot="10800000">
+            <a:off x="1597153" y="3846786"/>
+            <a:ext cx="390983" cy="2062813"/>
+          </a:xfrm>
+          <a:prstGeom prst="bentConnector2">
+            <a:avLst/>
+          </a:prstGeom>
+          <a:ln>
+            <a:solidFill>
+              <a:schemeClr val="tx1"/>
+            </a:solidFill>
+          </a:ln>
+          <a:scene3d>
+            <a:camera prst="orthographicFront">
+              <a:rot lat="0" lon="10800000" rev="0"/>
+            </a:camera>
+            <a:lightRig rig="threePt" dir="t"/>
+          </a:scene3d>
+        </p:spPr>
+        <p:style>
+          <a:lnRef idx="2">
+            <a:schemeClr val="accent1"/>
+          </a:lnRef>
+          <a:fillRef idx="0">
+            <a:schemeClr val="accent1"/>
+          </a:fillRef>
+          <a:effectRef idx="1">
+            <a:schemeClr val="accent1"/>
+          </a:effectRef>
+          <a:fontRef idx="minor">
+            <a:schemeClr val="tx1"/>
+          </a:fontRef>
+        </p:style>
+      </p:cxnSp>
+      <p:sp>
+        <p:nvSpPr>
+          <p:cNvPr id="18" name="Right Bracket 17">
+            <a:extLst>
+              <a:ext uri="{FF2B5EF4-FFF2-40B4-BE49-F238E27FC236}">
+                <a16:creationId xmlns:a16="http://schemas.microsoft.com/office/drawing/2014/main" id="{A70BF133-64D0-BE0F-1160-4F1A24B01572}"/>
+              </a:ext>
+            </a:extLst>
+          </p:cNvPr>
+          <p:cNvSpPr/>
+          <p:nvPr/>
+        </p:nvSpPr>
+        <p:spPr>
+          <a:xfrm rot="5400000">
+            <a:off x="2602730" y="3156316"/>
+            <a:ext cx="558413" cy="545367"/>
+          </a:xfrm>
+          <a:prstGeom prst="rightBracket">
+            <a:avLst/>
+          </a:prstGeom>
+          <a:ln>
+            <a:solidFill>
+              <a:schemeClr val="tx1"/>
+            </a:solidFill>
+          </a:ln>
+        </p:spPr>
+        <p:style>
+          <a:lnRef idx="2">
+            <a:schemeClr val="accent1"/>
+          </a:lnRef>
+          <a:fillRef idx="0">
+            <a:schemeClr val="accent1"/>
+          </a:fillRef>
+          <a:effectRef idx="1">
+            <a:schemeClr val="accent1"/>
+          </a:effectRef>
+          <a:fontRef idx="minor">
+            <a:schemeClr val="tx1"/>
+          </a:fontRef>
+        </p:style>
+        <p:txBody>
+          <a:bodyPr rtlCol="0" anchor="ctr"/>
+          <a:lstStyle/>
+          <a:p>
+            <a:pPr algn="ctr"/>
+            <a:endParaRPr lang="en-US"/>
+          </a:p>
+        </p:txBody>
+      </p:sp>
+      <p:sp>
+        <p:nvSpPr>
+          <p:cNvPr id="20" name="Right Bracket 19">
+            <a:extLst>
+              <a:ext uri="{FF2B5EF4-FFF2-40B4-BE49-F238E27FC236}">
+                <a16:creationId xmlns:a16="http://schemas.microsoft.com/office/drawing/2014/main" id="{BFA75F17-8199-2198-924F-1DF286803C58}"/>
+              </a:ext>
+            </a:extLst>
+          </p:cNvPr>
+          <p:cNvSpPr/>
+          <p:nvPr/>
+        </p:nvSpPr>
+        <p:spPr>
+          <a:xfrm rot="5400000">
+            <a:off x="1708930" y="3156315"/>
+            <a:ext cx="558413" cy="545367"/>
+          </a:xfrm>
+          <a:prstGeom prst="rightBracket">
+            <a:avLst/>
+          </a:prstGeom>
+          <a:ln>
+            <a:solidFill>
+              <a:schemeClr val="tx1"/>
+            </a:solidFill>
+          </a:ln>
+        </p:spPr>
+        <p:style>
+          <a:lnRef idx="2">
+            <a:schemeClr val="accent1"/>
+          </a:lnRef>
+          <a:fillRef idx="0">
+            <a:schemeClr val="accent1"/>
+          </a:fillRef>
+          <a:effectRef idx="1">
+            <a:schemeClr val="accent1"/>
+          </a:effectRef>
+          <a:fontRef idx="minor">
+            <a:schemeClr val="tx1"/>
+          </a:fontRef>
+        </p:style>
+        <p:txBody>
+          <a:bodyPr rtlCol="0" anchor="ctr"/>
+          <a:lstStyle/>
+          <a:p>
+            <a:pPr algn="ctr"/>
+            <a:endParaRPr lang="en-US"/>
+          </a:p>
+        </p:txBody>
+      </p:sp>
+      <p:cxnSp>
+        <p:nvCxnSpPr>
+          <p:cNvPr id="22" name="Straight Connector 21">
+            <a:extLst>
+              <a:ext uri="{FF2B5EF4-FFF2-40B4-BE49-F238E27FC236}">
+                <a16:creationId xmlns:a16="http://schemas.microsoft.com/office/drawing/2014/main" id="{2917321A-2438-17AD-B109-028B0741A24B}"/>
+              </a:ext>
+            </a:extLst>
+          </p:cNvPr>
+          <p:cNvCxnSpPr>
+            <a:stCxn id="18" idx="2"/>
+          </p:cNvCxnSpPr>
+          <p:nvPr/>
+        </p:nvCxnSpPr>
+        <p:spPr>
+          <a:xfrm>
+            <a:off x="2881936" y="3708206"/>
+            <a:ext cx="0" cy="138580"/>
+          </a:xfrm>
+          <a:prstGeom prst="line">
+            <a:avLst/>
+          </a:prstGeom>
+          <a:ln>
+            <a:solidFill>
+              <a:schemeClr val="tx1"/>
+            </a:solidFill>
+          </a:ln>
+        </p:spPr>
+        <p:style>
+          <a:lnRef idx="2">
+            <a:schemeClr val="accent1"/>
+          </a:lnRef>
+          <a:fillRef idx="0">
+            <a:schemeClr val="accent1"/>
+          </a:fillRef>
+          <a:effectRef idx="1">
+            <a:schemeClr val="accent1"/>
+          </a:effectRef>
+          <a:fontRef idx="minor">
+            <a:schemeClr val="tx1"/>
+          </a:fontRef>
+        </p:style>
+      </p:cxnSp>
+      <p:cxnSp>
+        <p:nvCxnSpPr>
+          <p:cNvPr id="24" name="Straight Connector 23">
+            <a:extLst>
+              <a:ext uri="{FF2B5EF4-FFF2-40B4-BE49-F238E27FC236}">
+                <a16:creationId xmlns:a16="http://schemas.microsoft.com/office/drawing/2014/main" id="{38E4604E-68DB-3298-0355-837F87D6116B}"/>
+              </a:ext>
+            </a:extLst>
+          </p:cNvPr>
+          <p:cNvCxnSpPr>
+            <a:cxnSpLocks/>
+          </p:cNvCxnSpPr>
+          <p:nvPr/>
+        </p:nvCxnSpPr>
+        <p:spPr>
+          <a:xfrm>
+            <a:off x="1974176" y="3708205"/>
+            <a:ext cx="0" cy="138581"/>
+          </a:xfrm>
+          <a:prstGeom prst="line">
+            <a:avLst/>
+          </a:prstGeom>
+          <a:ln>
+            <a:solidFill>
+              <a:schemeClr val="tx1"/>
+            </a:solidFill>
+          </a:ln>
+        </p:spPr>
+        <p:style>
+          <a:lnRef idx="2">
+            <a:schemeClr val="accent1"/>
+          </a:lnRef>
+          <a:fillRef idx="0">
+            <a:schemeClr val="accent1"/>
+          </a:fillRef>
+          <a:effectRef idx="1">
+            <a:schemeClr val="accent1"/>
+          </a:effectRef>
+          <a:fontRef idx="minor">
+            <a:schemeClr val="tx1"/>
+          </a:fontRef>
+        </p:style>
+      </p:cxnSp>
+      <p:sp>
+        <p:nvSpPr>
+          <p:cNvPr id="26" name="TextBox 25">
+            <a:extLst>
+              <a:ext uri="{FF2B5EF4-FFF2-40B4-BE49-F238E27FC236}">
+                <a16:creationId xmlns:a16="http://schemas.microsoft.com/office/drawing/2014/main" id="{E48AB02F-9D6A-6FF9-BA9F-F9870BF2CF93}"/>
+              </a:ext>
+            </a:extLst>
+          </p:cNvPr>
+          <p:cNvSpPr txBox="1"/>
+          <p:nvPr/>
+        </p:nvSpPr>
+        <p:spPr>
+          <a:xfrm>
+            <a:off x="2798432" y="4639665"/>
+            <a:ext cx="356188" cy="477054"/>
+          </a:xfrm>
+          <a:prstGeom prst="rect">
+            <a:avLst/>
+          </a:prstGeom>
+          <a:noFill/>
+        </p:spPr>
+        <p:txBody>
+          <a:bodyPr wrap="none" rtlCol="0">
+            <a:spAutoFit/>
+          </a:bodyPr>
+          <a:lstStyle/>
+          <a:p>
+            <a:r>
+              <a:rPr lang="en-US" sz="2500" dirty="0"/>
+              <a:t>+</a:t>
+            </a:r>
+          </a:p>
+        </p:txBody>
+      </p:sp>
+      <p:sp>
+        <p:nvSpPr>
+          <p:cNvPr id="28" name="TextBox 27">
+            <a:extLst>
+              <a:ext uri="{FF2B5EF4-FFF2-40B4-BE49-F238E27FC236}">
+                <a16:creationId xmlns:a16="http://schemas.microsoft.com/office/drawing/2014/main" id="{F742ED67-E1D8-1BC6-45D0-3B5124D7DA6E}"/>
+              </a:ext>
+            </a:extLst>
+          </p:cNvPr>
+          <p:cNvSpPr txBox="1"/>
+          <p:nvPr/>
+        </p:nvSpPr>
+        <p:spPr>
+          <a:xfrm>
+            <a:off x="1695568" y="4637721"/>
+            <a:ext cx="356188" cy="477054"/>
+          </a:xfrm>
+          <a:prstGeom prst="rect">
+            <a:avLst/>
+          </a:prstGeom>
+          <a:noFill/>
+        </p:spPr>
+        <p:txBody>
+          <a:bodyPr wrap="none" rtlCol="0">
+            <a:spAutoFit/>
+          </a:bodyPr>
+          <a:lstStyle/>
+          <a:p>
+            <a:r>
+              <a:rPr lang="en-US" sz="2500" dirty="0"/>
+              <a:t>+</a:t>
+            </a:r>
+          </a:p>
+        </p:txBody>
+      </p:sp>
+      <p:cxnSp>
+        <p:nvCxnSpPr>
+          <p:cNvPr id="45" name="Straight Arrow Connector 44">
+            <a:extLst>
+              <a:ext uri="{FF2B5EF4-FFF2-40B4-BE49-F238E27FC236}">
+                <a16:creationId xmlns:a16="http://schemas.microsoft.com/office/drawing/2014/main" id="{64E0DF55-EE8D-3E23-F29B-6F94FC6FB663}"/>
+              </a:ext>
+            </a:extLst>
+          </p:cNvPr>
+          <p:cNvCxnSpPr/>
+          <p:nvPr/>
+        </p:nvCxnSpPr>
+        <p:spPr>
+          <a:xfrm flipV="1">
+            <a:off x="2380193" y="1652975"/>
+            <a:ext cx="0" cy="1341510"/>
+          </a:xfrm>
+          <a:prstGeom prst="straightConnector1">
+            <a:avLst/>
+          </a:prstGeom>
+          <a:ln w="38100">
+            <a:solidFill>
+              <a:schemeClr val="tx1"/>
+            </a:solidFill>
+            <a:prstDash val="dash"/>
+            <a:tailEnd type="triangle"/>
+          </a:ln>
+        </p:spPr>
+        <p:style>
+          <a:lnRef idx="2">
+            <a:schemeClr val="accent1"/>
+          </a:lnRef>
+          <a:fillRef idx="0">
+            <a:schemeClr val="accent1"/>
+          </a:fillRef>
+          <a:effectRef idx="1">
+            <a:schemeClr val="accent1"/>
+          </a:effectRef>
+          <a:fontRef idx="minor">
+            <a:schemeClr val="tx1"/>
+          </a:fontRef>
+        </p:style>
+      </p:cxnSp>
+      <p:grpSp>
+        <p:nvGrpSpPr>
+          <p:cNvPr id="59" name="Group 58">
+            <a:extLst>
+              <a:ext uri="{FF2B5EF4-FFF2-40B4-BE49-F238E27FC236}">
+                <a16:creationId xmlns:a16="http://schemas.microsoft.com/office/drawing/2014/main" id="{4F5D8905-D23F-9597-C0CA-BF1A3D99E154}"/>
+              </a:ext>
+            </a:extLst>
+          </p:cNvPr>
+          <p:cNvGrpSpPr/>
+          <p:nvPr/>
+        </p:nvGrpSpPr>
+        <p:grpSpPr>
+          <a:xfrm rot="20911186">
+            <a:off x="7544277" y="2899362"/>
+            <a:ext cx="3142175" cy="3258680"/>
+            <a:chOff x="5057788" y="3149792"/>
+            <a:chExt cx="3142175" cy="3258680"/>
+          </a:xfrm>
+        </p:grpSpPr>
+        <p:sp>
+          <p:nvSpPr>
+            <p:cNvPr id="46" name="Rectangle 45">
+              <a:extLst>
+                <a:ext uri="{FF2B5EF4-FFF2-40B4-BE49-F238E27FC236}">
+                  <a16:creationId xmlns:a16="http://schemas.microsoft.com/office/drawing/2014/main" id="{1F396AEE-7A3C-8AE4-47F6-8E3BA0722376}"/>
+                </a:ext>
+              </a:extLst>
+            </p:cNvPr>
+            <p:cNvSpPr/>
+            <p:nvPr/>
+          </p:nvSpPr>
+          <p:spPr>
+            <a:xfrm>
+              <a:off x="5776907" y="3846786"/>
+              <a:ext cx="1703937" cy="2201182"/>
+            </a:xfrm>
+            <a:prstGeom prst="rect">
+              <a:avLst/>
+            </a:prstGeom>
+            <a:noFill/>
+            <a:ln w="38100"/>
+          </p:spPr>
+          <p:style>
+            <a:lnRef idx="2">
+              <a:schemeClr val="accent1">
+                <a:shade val="15000"/>
+              </a:schemeClr>
+            </a:lnRef>
+            <a:fillRef idx="1">
+              <a:schemeClr val="accent1"/>
+            </a:fillRef>
+            <a:effectRef idx="0">
+              <a:schemeClr val="accent1"/>
+            </a:effectRef>
+            <a:fontRef idx="minor">
+              <a:schemeClr val="lt1"/>
+            </a:fontRef>
+          </p:style>
+          <p:txBody>
+            <a:bodyPr rtlCol="0" anchor="ctr"/>
+            <a:lstStyle/>
+            <a:p>
+              <a:pPr algn="ctr"/>
+              <a:endParaRPr lang="en-US"/>
+            </a:p>
+          </p:txBody>
+        </p:sp>
+        <p:sp>
+          <p:nvSpPr>
+            <p:cNvPr id="47" name="Rectangle 46">
+              <a:extLst>
+                <a:ext uri="{FF2B5EF4-FFF2-40B4-BE49-F238E27FC236}">
+                  <a16:creationId xmlns:a16="http://schemas.microsoft.com/office/drawing/2014/main" id="{9C9454CB-CBF9-A9F9-E1AD-D12A43D695F5}"/>
+                </a:ext>
+              </a:extLst>
+            </p:cNvPr>
+            <p:cNvSpPr/>
+            <p:nvPr/>
+          </p:nvSpPr>
+          <p:spPr>
+            <a:xfrm>
+              <a:off x="5057788" y="5410725"/>
+              <a:ext cx="719119" cy="997747"/>
+            </a:xfrm>
+            <a:prstGeom prst="rect">
+              <a:avLst/>
+            </a:prstGeom>
+            <a:noFill/>
+            <a:ln w="38100"/>
+          </p:spPr>
+          <p:style>
+            <a:lnRef idx="2">
+              <a:schemeClr val="accent1">
+                <a:shade val="15000"/>
+              </a:schemeClr>
+            </a:lnRef>
+            <a:fillRef idx="1">
+              <a:schemeClr val="accent1"/>
+            </a:fillRef>
+            <a:effectRef idx="0">
+              <a:schemeClr val="accent1"/>
+            </a:effectRef>
+            <a:fontRef idx="minor">
+              <a:schemeClr val="lt1"/>
+            </a:fontRef>
+          </p:style>
+          <p:txBody>
+            <a:bodyPr rtlCol="0" anchor="ctr"/>
+            <a:lstStyle/>
+            <a:p>
+              <a:pPr algn="ctr"/>
+              <a:endParaRPr lang="en-US"/>
+            </a:p>
+          </p:txBody>
+        </p:sp>
+        <p:sp>
+          <p:nvSpPr>
+            <p:cNvPr id="48" name="Rectangle 47">
+              <a:extLst>
+                <a:ext uri="{FF2B5EF4-FFF2-40B4-BE49-F238E27FC236}">
+                  <a16:creationId xmlns:a16="http://schemas.microsoft.com/office/drawing/2014/main" id="{859C292D-E2DE-FB2D-CE9D-C87AE870AFA5}"/>
+                </a:ext>
+              </a:extLst>
+            </p:cNvPr>
+            <p:cNvSpPr/>
+            <p:nvPr/>
+          </p:nvSpPr>
+          <p:spPr>
+            <a:xfrm>
+              <a:off x="7480844" y="5410725"/>
+              <a:ext cx="719119" cy="997747"/>
+            </a:xfrm>
+            <a:prstGeom prst="rect">
+              <a:avLst/>
+            </a:prstGeom>
+            <a:noFill/>
+            <a:ln w="38100"/>
+          </p:spPr>
+          <p:style>
+            <a:lnRef idx="2">
+              <a:schemeClr val="accent1">
+                <a:shade val="15000"/>
+              </a:schemeClr>
+            </a:lnRef>
+            <a:fillRef idx="1">
+              <a:schemeClr val="accent1"/>
+            </a:fillRef>
+            <a:effectRef idx="0">
+              <a:schemeClr val="accent1"/>
+            </a:effectRef>
+            <a:fontRef idx="minor">
+              <a:schemeClr val="lt1"/>
+            </a:fontRef>
+          </p:style>
+          <p:txBody>
+            <a:bodyPr rtlCol="0" anchor="ctr"/>
+            <a:lstStyle/>
+            <a:p>
+              <a:pPr algn="ctr"/>
+              <a:endParaRPr lang="en-US"/>
+            </a:p>
+          </p:txBody>
+        </p:sp>
+        <p:cxnSp>
+          <p:nvCxnSpPr>
+            <p:cNvPr id="49" name="Connector: Elbow 48">
+              <a:extLst>
+                <a:ext uri="{FF2B5EF4-FFF2-40B4-BE49-F238E27FC236}">
+                  <a16:creationId xmlns:a16="http://schemas.microsoft.com/office/drawing/2014/main" id="{B78B4D36-C1FE-68A0-1B5F-6219C1400DB5}"/>
+                </a:ext>
+              </a:extLst>
+            </p:cNvPr>
+            <p:cNvCxnSpPr>
+              <a:cxnSpLocks/>
+              <a:stCxn id="48" idx="1"/>
+            </p:cNvCxnSpPr>
+            <p:nvPr/>
+          </p:nvCxnSpPr>
+          <p:spPr>
+            <a:xfrm rot="10800000">
+              <a:off x="7089862" y="3846787"/>
+              <a:ext cx="390983" cy="2062813"/>
+            </a:xfrm>
+            <a:prstGeom prst="bentConnector2">
+              <a:avLst/>
+            </a:prstGeom>
+            <a:ln>
+              <a:solidFill>
+                <a:schemeClr val="tx1"/>
+              </a:solidFill>
+            </a:ln>
+          </p:spPr>
+          <p:style>
+            <a:lnRef idx="2">
+              <a:schemeClr val="accent1"/>
+            </a:lnRef>
+            <a:fillRef idx="0">
+              <a:schemeClr val="accent1"/>
+            </a:fillRef>
+            <a:effectRef idx="1">
+              <a:schemeClr val="accent1"/>
+            </a:effectRef>
+            <a:fontRef idx="minor">
+              <a:schemeClr val="tx1"/>
+            </a:fontRef>
+          </p:style>
+        </p:cxnSp>
+        <p:cxnSp>
+          <p:nvCxnSpPr>
+            <p:cNvPr id="50" name="Connector: Elbow 49">
+              <a:extLst>
+                <a:ext uri="{FF2B5EF4-FFF2-40B4-BE49-F238E27FC236}">
+                  <a16:creationId xmlns:a16="http://schemas.microsoft.com/office/drawing/2014/main" id="{1F763763-BCD7-053B-9A76-83476A487648}"/>
+                </a:ext>
+              </a:extLst>
+            </p:cNvPr>
+            <p:cNvCxnSpPr>
+              <a:cxnSpLocks/>
+            </p:cNvCxnSpPr>
+            <p:nvPr/>
+          </p:nvCxnSpPr>
+          <p:spPr>
+            <a:xfrm rot="10800000">
+              <a:off x="5805077" y="3846786"/>
+              <a:ext cx="390983" cy="2062813"/>
+            </a:xfrm>
+            <a:prstGeom prst="bentConnector2">
+              <a:avLst/>
+            </a:prstGeom>
+            <a:ln>
+              <a:solidFill>
+                <a:schemeClr val="tx1"/>
+              </a:solidFill>
+            </a:ln>
+            <a:scene3d>
+              <a:camera prst="orthographicFront">
+                <a:rot lat="0" lon="10800000" rev="0"/>
+              </a:camera>
+              <a:lightRig rig="threePt" dir="t"/>
+            </a:scene3d>
+          </p:spPr>
+          <p:style>
+            <a:lnRef idx="2">
+              <a:schemeClr val="accent1"/>
+            </a:lnRef>
+            <a:fillRef idx="0">
+              <a:schemeClr val="accent1"/>
+            </a:fillRef>
+            <a:effectRef idx="1">
+              <a:schemeClr val="accent1"/>
+            </a:effectRef>
+            <a:fontRef idx="minor">
+              <a:schemeClr val="tx1"/>
+            </a:fontRef>
+          </p:style>
+        </p:cxnSp>
+        <p:sp>
+          <p:nvSpPr>
+            <p:cNvPr id="51" name="Right Bracket 50">
+              <a:extLst>
+                <a:ext uri="{FF2B5EF4-FFF2-40B4-BE49-F238E27FC236}">
+                  <a16:creationId xmlns:a16="http://schemas.microsoft.com/office/drawing/2014/main" id="{33CE6EF0-3602-21C6-B2C1-383DCBFEA1A9}"/>
+                </a:ext>
+              </a:extLst>
+            </p:cNvPr>
+            <p:cNvSpPr/>
+            <p:nvPr/>
+          </p:nvSpPr>
+          <p:spPr>
+            <a:xfrm rot="5400000">
+              <a:off x="6810654" y="3156316"/>
+              <a:ext cx="558413" cy="545367"/>
+            </a:xfrm>
+            <a:prstGeom prst="rightBracket">
+              <a:avLst/>
+            </a:prstGeom>
+            <a:ln>
+              <a:solidFill>
+                <a:schemeClr val="tx1"/>
+              </a:solidFill>
+            </a:ln>
+          </p:spPr>
+          <p:style>
+            <a:lnRef idx="2">
+              <a:schemeClr val="accent1"/>
+            </a:lnRef>
+            <a:fillRef idx="0">
+              <a:schemeClr val="accent1"/>
+            </a:fillRef>
+            <a:effectRef idx="1">
+              <a:schemeClr val="accent1"/>
+            </a:effectRef>
+            <a:fontRef idx="minor">
+              <a:schemeClr val="tx1"/>
+            </a:fontRef>
+          </p:style>
+          <p:txBody>
+            <a:bodyPr rtlCol="0" anchor="ctr"/>
+            <a:lstStyle/>
+            <a:p>
+              <a:pPr algn="ctr"/>
+              <a:endParaRPr lang="en-US"/>
+            </a:p>
+          </p:txBody>
+        </p:sp>
+        <p:sp>
+          <p:nvSpPr>
+            <p:cNvPr id="52" name="Right Bracket 51">
+              <a:extLst>
+                <a:ext uri="{FF2B5EF4-FFF2-40B4-BE49-F238E27FC236}">
+                  <a16:creationId xmlns:a16="http://schemas.microsoft.com/office/drawing/2014/main" id="{BE6B3D71-DC2B-CC7E-A4EC-62E5A77B4DDA}"/>
+                </a:ext>
+              </a:extLst>
+            </p:cNvPr>
+            <p:cNvSpPr/>
+            <p:nvPr/>
+          </p:nvSpPr>
+          <p:spPr>
+            <a:xfrm rot="5400000">
+              <a:off x="5916854" y="3156315"/>
+              <a:ext cx="558413" cy="545367"/>
+            </a:xfrm>
+            <a:prstGeom prst="rightBracket">
+              <a:avLst/>
+            </a:prstGeom>
+            <a:ln>
+              <a:solidFill>
+                <a:schemeClr val="tx1"/>
+              </a:solidFill>
+            </a:ln>
+          </p:spPr>
+          <p:style>
+            <a:lnRef idx="2">
+              <a:schemeClr val="accent1"/>
+            </a:lnRef>
+            <a:fillRef idx="0">
+              <a:schemeClr val="accent1"/>
+            </a:fillRef>
+            <a:effectRef idx="1">
+              <a:schemeClr val="accent1"/>
+            </a:effectRef>
+            <a:fontRef idx="minor">
+              <a:schemeClr val="tx1"/>
+            </a:fontRef>
+          </p:style>
+          <p:txBody>
+            <a:bodyPr rtlCol="0" anchor="ctr"/>
+            <a:lstStyle/>
+            <a:p>
+              <a:pPr algn="ctr"/>
+              <a:endParaRPr lang="en-US"/>
+            </a:p>
+          </p:txBody>
+        </p:sp>
+        <p:cxnSp>
+          <p:nvCxnSpPr>
+            <p:cNvPr id="53" name="Straight Connector 52">
+              <a:extLst>
+                <a:ext uri="{FF2B5EF4-FFF2-40B4-BE49-F238E27FC236}">
+                  <a16:creationId xmlns:a16="http://schemas.microsoft.com/office/drawing/2014/main" id="{259DBFA5-08B5-C971-D7D4-D721B81E7DB3}"/>
+                </a:ext>
+              </a:extLst>
+            </p:cNvPr>
+            <p:cNvCxnSpPr>
+              <a:stCxn id="51" idx="2"/>
+            </p:cNvCxnSpPr>
+            <p:nvPr/>
+          </p:nvCxnSpPr>
+          <p:spPr>
+            <a:xfrm>
+              <a:off x="7089860" y="3708206"/>
+              <a:ext cx="0" cy="138580"/>
+            </a:xfrm>
+            <a:prstGeom prst="line">
+              <a:avLst/>
+            </a:prstGeom>
+            <a:ln>
+              <a:solidFill>
+                <a:schemeClr val="tx1"/>
+              </a:solidFill>
+            </a:ln>
+          </p:spPr>
+          <p:style>
+            <a:lnRef idx="2">
+              <a:schemeClr val="accent1"/>
+            </a:lnRef>
+            <a:fillRef idx="0">
+              <a:schemeClr val="accent1"/>
+            </a:fillRef>
+            <a:effectRef idx="1">
+              <a:schemeClr val="accent1"/>
+            </a:effectRef>
+            <a:fontRef idx="minor">
+              <a:schemeClr val="tx1"/>
+            </a:fontRef>
+          </p:style>
+        </p:cxnSp>
+        <p:cxnSp>
+          <p:nvCxnSpPr>
+            <p:cNvPr id="54" name="Straight Connector 53">
+              <a:extLst>
+                <a:ext uri="{FF2B5EF4-FFF2-40B4-BE49-F238E27FC236}">
+                  <a16:creationId xmlns:a16="http://schemas.microsoft.com/office/drawing/2014/main" id="{43D0F481-9589-BF6A-5CEB-1141EC7FAE65}"/>
+                </a:ext>
+              </a:extLst>
+            </p:cNvPr>
+            <p:cNvCxnSpPr>
+              <a:cxnSpLocks/>
+            </p:cNvCxnSpPr>
+            <p:nvPr/>
+          </p:nvCxnSpPr>
+          <p:spPr>
+            <a:xfrm>
+              <a:off x="6182100" y="3708205"/>
+              <a:ext cx="0" cy="138581"/>
+            </a:xfrm>
+            <a:prstGeom prst="line">
+              <a:avLst/>
+            </a:prstGeom>
+            <a:ln>
+              <a:solidFill>
+                <a:schemeClr val="tx1"/>
+              </a:solidFill>
+            </a:ln>
+          </p:spPr>
+          <p:style>
+            <a:lnRef idx="2">
+              <a:schemeClr val="accent1"/>
+            </a:lnRef>
+            <a:fillRef idx="0">
+              <a:schemeClr val="accent1"/>
+            </a:fillRef>
+            <a:effectRef idx="1">
+              <a:schemeClr val="accent1"/>
+            </a:effectRef>
+            <a:fontRef idx="minor">
+              <a:schemeClr val="tx1"/>
+            </a:fontRef>
+          </p:style>
+        </p:cxnSp>
+        <p:sp>
+          <p:nvSpPr>
+            <p:cNvPr id="55" name="TextBox 54">
+              <a:extLst>
+                <a:ext uri="{FF2B5EF4-FFF2-40B4-BE49-F238E27FC236}">
+                  <a16:creationId xmlns:a16="http://schemas.microsoft.com/office/drawing/2014/main" id="{FAD50C4C-BA85-AF16-D50E-2C63E03786FD}"/>
+                </a:ext>
+              </a:extLst>
+            </p:cNvPr>
+            <p:cNvSpPr txBox="1"/>
+            <p:nvPr/>
+          </p:nvSpPr>
+          <p:spPr>
+            <a:xfrm>
+              <a:off x="7006356" y="4639665"/>
+              <a:ext cx="356188" cy="477054"/>
+            </a:xfrm>
+            <a:prstGeom prst="rect">
+              <a:avLst/>
+            </a:prstGeom>
+            <a:noFill/>
+          </p:spPr>
+          <p:txBody>
+            <a:bodyPr wrap="none" rtlCol="0">
+              <a:spAutoFit/>
+            </a:bodyPr>
+            <a:lstStyle/>
+            <a:p>
+              <a:r>
+                <a:rPr lang="en-US" sz="2500" dirty="0"/>
+                <a:t>+</a:t>
+              </a:r>
+            </a:p>
+          </p:txBody>
+        </p:sp>
+        <p:sp>
+          <p:nvSpPr>
+            <p:cNvPr id="56" name="TextBox 55">
+              <a:extLst>
+                <a:ext uri="{FF2B5EF4-FFF2-40B4-BE49-F238E27FC236}">
+                  <a16:creationId xmlns:a16="http://schemas.microsoft.com/office/drawing/2014/main" id="{0EDB8A9F-7706-AC84-89EA-F53A778694A6}"/>
+                </a:ext>
+              </a:extLst>
+            </p:cNvPr>
+            <p:cNvSpPr txBox="1"/>
+            <p:nvPr/>
+          </p:nvSpPr>
+          <p:spPr>
+            <a:xfrm>
+              <a:off x="5903492" y="4637721"/>
+              <a:ext cx="356188" cy="477054"/>
+            </a:xfrm>
+            <a:prstGeom prst="rect">
+              <a:avLst/>
+            </a:prstGeom>
+            <a:noFill/>
+          </p:spPr>
+          <p:txBody>
+            <a:bodyPr wrap="none" rtlCol="0">
+              <a:spAutoFit/>
+            </a:bodyPr>
+            <a:lstStyle/>
+            <a:p>
+              <a:r>
+                <a:rPr lang="en-US" sz="2500" dirty="0"/>
+                <a:t>+</a:t>
+              </a:r>
+            </a:p>
+          </p:txBody>
+        </p:sp>
+      </p:grpSp>
+      <p:sp>
+        <p:nvSpPr>
+          <p:cNvPr id="86" name="Trapezoid 85">
+            <a:extLst>
+              <a:ext uri="{FF2B5EF4-FFF2-40B4-BE49-F238E27FC236}">
+                <a16:creationId xmlns:a16="http://schemas.microsoft.com/office/drawing/2014/main" id="{A965AD93-9B96-F03C-8F08-90324F5CA606}"/>
+              </a:ext>
+            </a:extLst>
+          </p:cNvPr>
+          <p:cNvSpPr/>
+          <p:nvPr/>
+        </p:nvSpPr>
+        <p:spPr>
+          <a:xfrm rot="10800000">
+            <a:off x="1488011" y="1263106"/>
+            <a:ext cx="938713" cy="1930581"/>
+          </a:xfrm>
+          <a:prstGeom prst="trapezoid">
+            <a:avLst>
+              <a:gd name="adj" fmla="val 30809"/>
+            </a:avLst>
+          </a:prstGeom>
+          <a:solidFill>
+            <a:schemeClr val="bg1">
+              <a:lumMod val="85000"/>
+              <a:alpha val="30000"/>
+            </a:schemeClr>
+          </a:solidFill>
+          <a:ln>
+            <a:solidFill>
+              <a:schemeClr val="bg1">
+                <a:lumMod val="75000"/>
+                <a:alpha val="20000"/>
+              </a:schemeClr>
+            </a:solidFill>
+          </a:ln>
+        </p:spPr>
+        <p:style>
+          <a:lnRef idx="2">
+            <a:schemeClr val="accent1">
+              <a:shade val="15000"/>
+            </a:schemeClr>
+          </a:lnRef>
+          <a:fillRef idx="1">
+            <a:schemeClr val="accent1"/>
+          </a:fillRef>
+          <a:effectRef idx="0">
+            <a:schemeClr val="accent1"/>
+          </a:effectRef>
+          <a:fontRef idx="minor">
+            <a:schemeClr val="lt1"/>
+          </a:fontRef>
+        </p:style>
+        <p:txBody>
+          <a:bodyPr rtlCol="0" anchor="ctr"/>
+          <a:lstStyle/>
+          <a:p>
+            <a:pPr algn="ctr"/>
+            <a:endParaRPr lang="en-US"/>
+          </a:p>
+        </p:txBody>
+      </p:sp>
+      <p:sp>
+        <p:nvSpPr>
+          <p:cNvPr id="100" name="Trapezoid 99">
+            <a:extLst>
+              <a:ext uri="{FF2B5EF4-FFF2-40B4-BE49-F238E27FC236}">
+                <a16:creationId xmlns:a16="http://schemas.microsoft.com/office/drawing/2014/main" id="{29512FCD-DE2D-1AC7-07B1-CD6F77B9EE54}"/>
+              </a:ext>
+            </a:extLst>
+          </p:cNvPr>
+          <p:cNvSpPr/>
+          <p:nvPr/>
+        </p:nvSpPr>
+        <p:spPr>
+          <a:xfrm rot="10800000">
+            <a:off x="2415479" y="1263105"/>
+            <a:ext cx="938713" cy="1930581"/>
+          </a:xfrm>
+          <a:prstGeom prst="trapezoid">
+            <a:avLst>
+              <a:gd name="adj" fmla="val 30809"/>
+            </a:avLst>
+          </a:prstGeom>
+          <a:solidFill>
+            <a:schemeClr val="bg1">
+              <a:lumMod val="85000"/>
+              <a:alpha val="30000"/>
+            </a:schemeClr>
+          </a:solidFill>
+          <a:ln>
+            <a:solidFill>
+              <a:schemeClr val="bg1">
+                <a:lumMod val="75000"/>
+                <a:alpha val="20000"/>
+              </a:schemeClr>
+            </a:solidFill>
+          </a:ln>
+        </p:spPr>
+        <p:style>
+          <a:lnRef idx="2">
+            <a:schemeClr val="accent1">
+              <a:shade val="15000"/>
+            </a:schemeClr>
+          </a:lnRef>
+          <a:fillRef idx="1">
+            <a:schemeClr val="accent1"/>
+          </a:fillRef>
+          <a:effectRef idx="0">
+            <a:schemeClr val="accent1"/>
+          </a:effectRef>
+          <a:fontRef idx="minor">
+            <a:schemeClr val="lt1"/>
+          </a:fontRef>
+        </p:style>
+        <p:txBody>
+          <a:bodyPr rtlCol="0" anchor="ctr"/>
+          <a:lstStyle/>
+          <a:p>
+            <a:pPr algn="ctr"/>
+            <a:endParaRPr lang="en-US"/>
+          </a:p>
+        </p:txBody>
+      </p:sp>
+      <p:sp>
+        <p:nvSpPr>
+          <p:cNvPr id="102" name="Trapezoid 101">
+            <a:extLst>
+              <a:ext uri="{FF2B5EF4-FFF2-40B4-BE49-F238E27FC236}">
+                <a16:creationId xmlns:a16="http://schemas.microsoft.com/office/drawing/2014/main" id="{1DD80FBF-B327-C46E-410B-D59E7BFECD77}"/>
+              </a:ext>
+            </a:extLst>
+          </p:cNvPr>
+          <p:cNvSpPr/>
+          <p:nvPr/>
+        </p:nvSpPr>
+        <p:spPr>
+          <a:xfrm rot="10241884">
+            <a:off x="8550079" y="955270"/>
+            <a:ext cx="938713" cy="1930581"/>
+          </a:xfrm>
+          <a:prstGeom prst="trapezoid">
+            <a:avLst>
+              <a:gd name="adj" fmla="val 30809"/>
+            </a:avLst>
+          </a:prstGeom>
+          <a:solidFill>
+            <a:schemeClr val="bg1">
+              <a:lumMod val="85000"/>
+              <a:alpha val="30000"/>
+            </a:schemeClr>
+          </a:solidFill>
+          <a:ln>
+            <a:solidFill>
+              <a:schemeClr val="bg1">
+                <a:lumMod val="75000"/>
+                <a:alpha val="20000"/>
+              </a:schemeClr>
+            </a:solidFill>
+          </a:ln>
+        </p:spPr>
+        <p:style>
+          <a:lnRef idx="2">
+            <a:schemeClr val="accent1">
+              <a:shade val="15000"/>
+            </a:schemeClr>
+          </a:lnRef>
+          <a:fillRef idx="1">
+            <a:schemeClr val="accent1"/>
+          </a:fillRef>
+          <a:effectRef idx="0">
+            <a:schemeClr val="accent1"/>
+          </a:effectRef>
+          <a:fontRef idx="minor">
+            <a:schemeClr val="lt1"/>
+          </a:fontRef>
+        </p:style>
+        <p:txBody>
+          <a:bodyPr rtlCol="0" anchor="ctr"/>
+          <a:lstStyle/>
+          <a:p>
+            <a:pPr algn="ctr"/>
+            <a:endParaRPr lang="en-US"/>
+          </a:p>
+        </p:txBody>
+      </p:sp>
+      <p:sp>
+        <p:nvSpPr>
+          <p:cNvPr id="116" name="Trapezoid 115">
+            <a:extLst>
+              <a:ext uri="{FF2B5EF4-FFF2-40B4-BE49-F238E27FC236}">
+                <a16:creationId xmlns:a16="http://schemas.microsoft.com/office/drawing/2014/main" id="{A3D06073-6B05-9BA2-1E26-25B60AF6A597}"/>
+              </a:ext>
+            </a:extLst>
+          </p:cNvPr>
+          <p:cNvSpPr/>
+          <p:nvPr/>
+        </p:nvSpPr>
+        <p:spPr>
+          <a:xfrm rot="9902016">
+            <a:off x="7667399" y="1186069"/>
+            <a:ext cx="938713" cy="1930581"/>
+          </a:xfrm>
+          <a:prstGeom prst="trapezoid">
+            <a:avLst>
+              <a:gd name="adj" fmla="val 30809"/>
+            </a:avLst>
+          </a:prstGeom>
+          <a:solidFill>
+            <a:schemeClr val="bg1">
+              <a:lumMod val="85000"/>
+              <a:alpha val="30000"/>
+            </a:schemeClr>
+          </a:solidFill>
+          <a:ln>
+            <a:solidFill>
+              <a:schemeClr val="bg1">
+                <a:lumMod val="75000"/>
+                <a:alpha val="20000"/>
+              </a:schemeClr>
+            </a:solidFill>
+          </a:ln>
+        </p:spPr>
+        <p:style>
+          <a:lnRef idx="2">
+            <a:schemeClr val="accent1">
+              <a:shade val="15000"/>
+            </a:schemeClr>
+          </a:lnRef>
+          <a:fillRef idx="1">
+            <a:schemeClr val="accent1"/>
+          </a:fillRef>
+          <a:effectRef idx="0">
+            <a:schemeClr val="accent1"/>
+          </a:effectRef>
+          <a:fontRef idx="minor">
+            <a:schemeClr val="lt1"/>
+          </a:fontRef>
+        </p:style>
+        <p:txBody>
+          <a:bodyPr rtlCol="0" anchor="ctr"/>
+          <a:lstStyle/>
+          <a:p>
+            <a:pPr algn="ctr"/>
+            <a:endParaRPr lang="en-US"/>
+          </a:p>
+        </p:txBody>
+      </p:sp>
+      <p:sp>
+        <p:nvSpPr>
+          <p:cNvPr id="77" name="Arc 76">
+            <a:extLst>
+              <a:ext uri="{FF2B5EF4-FFF2-40B4-BE49-F238E27FC236}">
+                <a16:creationId xmlns:a16="http://schemas.microsoft.com/office/drawing/2014/main" id="{D583E65C-D77B-45CE-296E-C8B37BB93AE6}"/>
+              </a:ext>
+            </a:extLst>
+          </p:cNvPr>
+          <p:cNvSpPr/>
+          <p:nvPr/>
+        </p:nvSpPr>
+        <p:spPr>
+          <a:xfrm>
+            <a:off x="7264449" y="1666926"/>
+            <a:ext cx="1487798" cy="2564195"/>
+          </a:xfrm>
+          <a:prstGeom prst="arc">
+            <a:avLst/>
+          </a:prstGeom>
+          <a:ln w="38100">
+            <a:solidFill>
+              <a:schemeClr val="tx1"/>
+            </a:solidFill>
+            <a:prstDash val="dash"/>
+            <a:headEnd type="triangle"/>
+          </a:ln>
+        </p:spPr>
+        <p:style>
+          <a:lnRef idx="2">
+            <a:schemeClr val="accent1"/>
+          </a:lnRef>
+          <a:fillRef idx="0">
+            <a:schemeClr val="accent1"/>
+          </a:fillRef>
+          <a:effectRef idx="1">
+            <a:schemeClr val="accent1"/>
+          </a:effectRef>
+          <a:fontRef idx="minor">
+            <a:schemeClr val="tx1"/>
           </a:fontRef>
         </p:style>
         <p:txBody>

--- a/vehicleSchematic.pptx
+++ b/vehicleSchematic.pptx
@@ -5692,6 +5692,82 @@
           <a:p>
             <a:pPr algn="ctr"/>
             <a:endParaRPr lang="en-US"/>
+          </a:p>
+        </p:txBody>
+      </p:sp>
+      <p:sp>
+        <p:nvSpPr>
+          <p:cNvPr id="117" name="TextBox 116">
+            <a:extLst>
+              <a:ext uri="{FF2B5EF4-FFF2-40B4-BE49-F238E27FC236}">
+                <a16:creationId xmlns:a16="http://schemas.microsoft.com/office/drawing/2014/main" id="{F20F6172-107A-4A71-C057-FD76D2B2E1D8}"/>
+              </a:ext>
+            </a:extLst>
+          </p:cNvPr>
+          <p:cNvSpPr txBox="1"/>
+          <p:nvPr/>
+        </p:nvSpPr>
+        <p:spPr>
+          <a:xfrm>
+            <a:off x="1966476" y="6104684"/>
+            <a:ext cx="898003" cy="707886"/>
+          </a:xfrm>
+          <a:prstGeom prst="rect">
+            <a:avLst/>
+          </a:prstGeom>
+          <a:noFill/>
+        </p:spPr>
+        <p:txBody>
+          <a:bodyPr wrap="none" rtlCol="0">
+            <a:spAutoFit/>
+          </a:bodyPr>
+          <a:lstStyle/>
+          <a:p>
+            <a:r>
+              <a:rPr lang="en-US" sz="4000" dirty="0">
+                <a:latin typeface="Times New Roman" panose="02020603050405020304" pitchFamily="18" charset="0"/>
+                <a:cs typeface="Times New Roman" panose="02020603050405020304" pitchFamily="18" charset="0"/>
+              </a:rPr>
+              <a:t>(A)</a:t>
+            </a:r>
+          </a:p>
+        </p:txBody>
+      </p:sp>
+      <p:sp>
+        <p:nvSpPr>
+          <p:cNvPr id="119" name="TextBox 118">
+            <a:extLst>
+              <a:ext uri="{FF2B5EF4-FFF2-40B4-BE49-F238E27FC236}">
+                <a16:creationId xmlns:a16="http://schemas.microsoft.com/office/drawing/2014/main" id="{6B8B0E45-8EE6-49E0-2E6B-8F8FDDC0B3DF}"/>
+              </a:ext>
+            </a:extLst>
+          </p:cNvPr>
+          <p:cNvSpPr txBox="1"/>
+          <p:nvPr/>
+        </p:nvSpPr>
+        <p:spPr>
+          <a:xfrm>
+            <a:off x="9093970" y="6118585"/>
+            <a:ext cx="869149" cy="707886"/>
+          </a:xfrm>
+          <a:prstGeom prst="rect">
+            <a:avLst/>
+          </a:prstGeom>
+          <a:noFill/>
+        </p:spPr>
+        <p:txBody>
+          <a:bodyPr wrap="none" rtlCol="0">
+            <a:spAutoFit/>
+          </a:bodyPr>
+          <a:lstStyle/>
+          <a:p>
+            <a:r>
+              <a:rPr lang="en-US" sz="4000" dirty="0">
+                <a:latin typeface="Times New Roman" panose="02020603050405020304" pitchFamily="18" charset="0"/>
+                <a:cs typeface="Times New Roman" panose="02020603050405020304" pitchFamily="18" charset="0"/>
+              </a:rPr>
+              <a:t>(B)</a:t>
+            </a:r>
           </a:p>
         </p:txBody>
       </p:sp>

--- a/vehicleSchematic.pptx
+++ b/vehicleSchematic.pptx
@@ -259,7 +259,7 @@
           <a:p>
             <a:fld id="{26C1F16C-3122-4B8D-BA78-F575EE24161A}" type="datetimeFigureOut">
               <a:rPr lang="en-US" smtClean="0"/>
-              <a:t>10/1/2026</a:t>
+              <a:t>10/2/2026</a:t>
             </a:fld>
             <a:endParaRPr lang="en-US"/>
           </a:p>
@@ -457,7 +457,7 @@
           <a:p>
             <a:fld id="{26C1F16C-3122-4B8D-BA78-F575EE24161A}" type="datetimeFigureOut">
               <a:rPr lang="en-US" smtClean="0"/>
-              <a:t>10/1/2026</a:t>
+              <a:t>10/2/2026</a:t>
             </a:fld>
             <a:endParaRPr lang="en-US"/>
           </a:p>
@@ -665,7 +665,7 @@
           <a:p>
             <a:fld id="{26C1F16C-3122-4B8D-BA78-F575EE24161A}" type="datetimeFigureOut">
               <a:rPr lang="en-US" smtClean="0"/>
-              <a:t>10/1/2026</a:t>
+              <a:t>10/2/2026</a:t>
             </a:fld>
             <a:endParaRPr lang="en-US"/>
           </a:p>
@@ -863,7 +863,7 @@
           <a:p>
             <a:fld id="{26C1F16C-3122-4B8D-BA78-F575EE24161A}" type="datetimeFigureOut">
               <a:rPr lang="en-US" smtClean="0"/>
-              <a:t>10/1/2026</a:t>
+              <a:t>10/2/2026</a:t>
             </a:fld>
             <a:endParaRPr lang="en-US"/>
           </a:p>
@@ -1138,7 +1138,7 @@
           <a:p>
             <a:fld id="{26C1F16C-3122-4B8D-BA78-F575EE24161A}" type="datetimeFigureOut">
               <a:rPr lang="en-US" smtClean="0"/>
-              <a:t>10/1/2026</a:t>
+              <a:t>10/2/2026</a:t>
             </a:fld>
             <a:endParaRPr lang="en-US"/>
           </a:p>
@@ -1403,7 +1403,7 @@
           <a:p>
             <a:fld id="{26C1F16C-3122-4B8D-BA78-F575EE24161A}" type="datetimeFigureOut">
               <a:rPr lang="en-US" smtClean="0"/>
-              <a:t>10/1/2026</a:t>
+              <a:t>10/2/2026</a:t>
             </a:fld>
             <a:endParaRPr lang="en-US"/>
           </a:p>
@@ -1815,7 +1815,7 @@
           <a:p>
             <a:fld id="{26C1F16C-3122-4B8D-BA78-F575EE24161A}" type="datetimeFigureOut">
               <a:rPr lang="en-US" smtClean="0"/>
-              <a:t>10/1/2026</a:t>
+              <a:t>10/2/2026</a:t>
             </a:fld>
             <a:endParaRPr lang="en-US"/>
           </a:p>
@@ -1956,7 +1956,7 @@
           <a:p>
             <a:fld id="{26C1F16C-3122-4B8D-BA78-F575EE24161A}" type="datetimeFigureOut">
               <a:rPr lang="en-US" smtClean="0"/>
-              <a:t>10/1/2026</a:t>
+              <a:t>10/2/2026</a:t>
             </a:fld>
             <a:endParaRPr lang="en-US"/>
           </a:p>
@@ -2069,7 +2069,7 @@
           <a:p>
             <a:fld id="{26C1F16C-3122-4B8D-BA78-F575EE24161A}" type="datetimeFigureOut">
               <a:rPr lang="en-US" smtClean="0"/>
-              <a:t>10/1/2026</a:t>
+              <a:t>10/2/2026</a:t>
             </a:fld>
             <a:endParaRPr lang="en-US"/>
           </a:p>
@@ -2380,7 +2380,7 @@
           <a:p>
             <a:fld id="{26C1F16C-3122-4B8D-BA78-F575EE24161A}" type="datetimeFigureOut">
               <a:rPr lang="en-US" smtClean="0"/>
-              <a:t>10/1/2026</a:t>
+              <a:t>10/2/2026</a:t>
             </a:fld>
             <a:endParaRPr lang="en-US"/>
           </a:p>
@@ -2668,7 +2668,7 @@
           <a:p>
             <a:fld id="{26C1F16C-3122-4B8D-BA78-F575EE24161A}" type="datetimeFigureOut">
               <a:rPr lang="en-US" smtClean="0"/>
-              <a:t>10/1/2026</a:t>
+              <a:t>10/2/2026</a:t>
             </a:fld>
             <a:endParaRPr lang="en-US"/>
           </a:p>
@@ -2909,7 +2909,7 @@
           <a:p>
             <a:fld id="{26C1F16C-3122-4B8D-BA78-F575EE24161A}" type="datetimeFigureOut">
               <a:rPr lang="en-US" smtClean="0"/>
-              <a:t>10/1/2026</a:t>
+              <a:t>10/2/2026</a:t>
             </a:fld>
             <a:endParaRPr lang="en-US"/>
           </a:p>
@@ -5522,10 +5522,10 @@
       </p:sp>
       <p:sp>
         <p:nvSpPr>
-          <p:cNvPr id="102" name="Trapezoid 101">
-            <a:extLst>
-              <a:ext uri="{FF2B5EF4-FFF2-40B4-BE49-F238E27FC236}">
-                <a16:creationId xmlns:a16="http://schemas.microsoft.com/office/drawing/2014/main" id="{1DD80FBF-B327-C46E-410B-D59E7BFECD77}"/>
+          <p:cNvPr id="77" name="Arc 76">
+            <a:extLst>
+              <a:ext uri="{FF2B5EF4-FFF2-40B4-BE49-F238E27FC236}">
+                <a16:creationId xmlns:a16="http://schemas.microsoft.com/office/drawing/2014/main" id="{D583E65C-D77B-45CE-296E-C8B37BB93AE6}"/>
               </a:ext>
             </a:extLst>
           </p:cNvPr>
@@ -5533,8 +5533,219 @@
           <p:nvPr/>
         </p:nvSpPr>
         <p:spPr>
-          <a:xfrm rot="10241884">
-            <a:off x="8550079" y="955270"/>
+          <a:xfrm>
+            <a:off x="7264449" y="1666926"/>
+            <a:ext cx="1487798" cy="2564195"/>
+          </a:xfrm>
+          <a:prstGeom prst="arc">
+            <a:avLst/>
+          </a:prstGeom>
+          <a:ln w="38100">
+            <a:solidFill>
+              <a:schemeClr val="tx1"/>
+            </a:solidFill>
+            <a:prstDash val="dash"/>
+            <a:headEnd type="triangle"/>
+          </a:ln>
+        </p:spPr>
+        <p:style>
+          <a:lnRef idx="2">
+            <a:schemeClr val="accent1"/>
+          </a:lnRef>
+          <a:fillRef idx="0">
+            <a:schemeClr val="accent1"/>
+          </a:fillRef>
+          <a:effectRef idx="1">
+            <a:schemeClr val="accent1"/>
+          </a:effectRef>
+          <a:fontRef idx="minor">
+            <a:schemeClr val="tx1"/>
+          </a:fontRef>
+        </p:style>
+        <p:txBody>
+          <a:bodyPr rtlCol="0" anchor="ctr"/>
+          <a:lstStyle/>
+          <a:p>
+            <a:pPr algn="ctr"/>
+            <a:endParaRPr lang="en-US"/>
+          </a:p>
+        </p:txBody>
+      </p:sp>
+      <p:sp>
+        <p:nvSpPr>
+          <p:cNvPr id="117" name="TextBox 116">
+            <a:extLst>
+              <a:ext uri="{FF2B5EF4-FFF2-40B4-BE49-F238E27FC236}">
+                <a16:creationId xmlns:a16="http://schemas.microsoft.com/office/drawing/2014/main" id="{F20F6172-107A-4A71-C057-FD76D2B2E1D8}"/>
+              </a:ext>
+            </a:extLst>
+          </p:cNvPr>
+          <p:cNvSpPr txBox="1"/>
+          <p:nvPr/>
+        </p:nvSpPr>
+        <p:spPr>
+          <a:xfrm>
+            <a:off x="1966476" y="6104684"/>
+            <a:ext cx="898003" cy="707886"/>
+          </a:xfrm>
+          <a:prstGeom prst="rect">
+            <a:avLst/>
+          </a:prstGeom>
+          <a:noFill/>
+        </p:spPr>
+        <p:txBody>
+          <a:bodyPr wrap="none" rtlCol="0">
+            <a:spAutoFit/>
+          </a:bodyPr>
+          <a:lstStyle/>
+          <a:p>
+            <a:r>
+              <a:rPr lang="en-US" sz="4000" dirty="0">
+                <a:latin typeface="Times New Roman" panose="02020603050405020304" pitchFamily="18" charset="0"/>
+                <a:cs typeface="Times New Roman" panose="02020603050405020304" pitchFamily="18" charset="0"/>
+              </a:rPr>
+              <a:t>(A)</a:t>
+            </a:r>
+          </a:p>
+        </p:txBody>
+      </p:sp>
+      <p:sp>
+        <p:nvSpPr>
+          <p:cNvPr id="119" name="TextBox 118">
+            <a:extLst>
+              <a:ext uri="{FF2B5EF4-FFF2-40B4-BE49-F238E27FC236}">
+                <a16:creationId xmlns:a16="http://schemas.microsoft.com/office/drawing/2014/main" id="{6B8B0E45-8EE6-49E0-2E6B-8F8FDDC0B3DF}"/>
+              </a:ext>
+            </a:extLst>
+          </p:cNvPr>
+          <p:cNvSpPr txBox="1"/>
+          <p:nvPr/>
+        </p:nvSpPr>
+        <p:spPr>
+          <a:xfrm>
+            <a:off x="9093970" y="6118585"/>
+            <a:ext cx="869149" cy="707886"/>
+          </a:xfrm>
+          <a:prstGeom prst="rect">
+            <a:avLst/>
+          </a:prstGeom>
+          <a:noFill/>
+        </p:spPr>
+        <p:txBody>
+          <a:bodyPr wrap="none" rtlCol="0">
+            <a:spAutoFit/>
+          </a:bodyPr>
+          <a:lstStyle/>
+          <a:p>
+            <a:r>
+              <a:rPr lang="en-US" sz="4000" dirty="0">
+                <a:latin typeface="Times New Roman" panose="02020603050405020304" pitchFamily="18" charset="0"/>
+                <a:cs typeface="Times New Roman" panose="02020603050405020304" pitchFamily="18" charset="0"/>
+              </a:rPr>
+              <a:t>(B)</a:t>
+            </a:r>
+          </a:p>
+        </p:txBody>
+      </p:sp>
+      <p:cxnSp>
+        <p:nvCxnSpPr>
+          <p:cNvPr id="4" name="Straight Arrow Connector 3">
+            <a:extLst>
+              <a:ext uri="{FF2B5EF4-FFF2-40B4-BE49-F238E27FC236}">
+                <a16:creationId xmlns:a16="http://schemas.microsoft.com/office/drawing/2014/main" id="{BE13E591-615F-3299-F01F-5EEF9FFE9684}"/>
+              </a:ext>
+            </a:extLst>
+          </p:cNvPr>
+          <p:cNvCxnSpPr/>
+          <p:nvPr/>
+        </p:nvCxnSpPr>
+        <p:spPr>
+          <a:xfrm flipV="1">
+            <a:off x="3568425" y="4637721"/>
+            <a:ext cx="0" cy="1041626"/>
+          </a:xfrm>
+          <a:prstGeom prst="straightConnector1">
+            <a:avLst/>
+          </a:prstGeom>
+          <a:ln w="57150">
+            <a:solidFill>
+              <a:schemeClr val="tx1"/>
+            </a:solidFill>
+            <a:tailEnd type="triangle"/>
+          </a:ln>
+        </p:spPr>
+        <p:style>
+          <a:lnRef idx="2">
+            <a:schemeClr val="accent1"/>
+          </a:lnRef>
+          <a:fillRef idx="0">
+            <a:schemeClr val="accent1"/>
+          </a:fillRef>
+          <a:effectRef idx="1">
+            <a:schemeClr val="accent1"/>
+          </a:effectRef>
+          <a:fontRef idx="minor">
+            <a:schemeClr val="tx1"/>
+          </a:fontRef>
+        </p:style>
+      </p:cxnSp>
+      <p:cxnSp>
+        <p:nvCxnSpPr>
+          <p:cNvPr id="6" name="Straight Arrow Connector 5">
+            <a:extLst>
+              <a:ext uri="{FF2B5EF4-FFF2-40B4-BE49-F238E27FC236}">
+                <a16:creationId xmlns:a16="http://schemas.microsoft.com/office/drawing/2014/main" id="{50722FB1-6B02-3F84-D162-0B9A6B98572B}"/>
+              </a:ext>
+            </a:extLst>
+          </p:cNvPr>
+          <p:cNvCxnSpPr/>
+          <p:nvPr/>
+        </p:nvCxnSpPr>
+        <p:spPr>
+          <a:xfrm flipV="1">
+            <a:off x="1300713" y="4635198"/>
+            <a:ext cx="0" cy="1041626"/>
+          </a:xfrm>
+          <a:prstGeom prst="straightConnector1">
+            <a:avLst/>
+          </a:prstGeom>
+          <a:ln w="57150">
+            <a:solidFill>
+              <a:schemeClr val="tx1"/>
+            </a:solidFill>
+            <a:tailEnd type="triangle"/>
+          </a:ln>
+        </p:spPr>
+        <p:style>
+          <a:lnRef idx="2">
+            <a:schemeClr val="accent1"/>
+          </a:lnRef>
+          <a:fillRef idx="0">
+            <a:schemeClr val="accent1"/>
+          </a:fillRef>
+          <a:effectRef idx="1">
+            <a:schemeClr val="accent1"/>
+          </a:effectRef>
+          <a:fontRef idx="minor">
+            <a:schemeClr val="tx1"/>
+          </a:fontRef>
+        </p:style>
+      </p:cxnSp>
+      <p:sp>
+        <p:nvSpPr>
+          <p:cNvPr id="17" name="Trapezoid 16">
+            <a:extLst>
+              <a:ext uri="{FF2B5EF4-FFF2-40B4-BE49-F238E27FC236}">
+                <a16:creationId xmlns:a16="http://schemas.microsoft.com/office/drawing/2014/main" id="{0F2FDC14-4BBB-6901-3F4B-BDF71F01B49F}"/>
+              </a:ext>
+            </a:extLst>
+          </p:cNvPr>
+          <p:cNvSpPr/>
+          <p:nvPr/>
+        </p:nvSpPr>
+        <p:spPr>
+          <a:xfrm rot="10222313">
+            <a:off x="8614663" y="960239"/>
             <a:ext cx="938713" cy="1930581"/>
           </a:xfrm>
           <a:prstGeom prst="trapezoid">
@@ -5584,10 +5795,10 @@
       </p:sp>
       <p:sp>
         <p:nvSpPr>
-          <p:cNvPr id="116" name="Trapezoid 115">
-            <a:extLst>
-              <a:ext uri="{FF2B5EF4-FFF2-40B4-BE49-F238E27FC236}">
-                <a16:creationId xmlns:a16="http://schemas.microsoft.com/office/drawing/2014/main" id="{A3D06073-6B05-9BA2-1E26-25B60AF6A597}"/>
+          <p:cNvPr id="21" name="Trapezoid 20">
+            <a:extLst>
+              <a:ext uri="{FF2B5EF4-FFF2-40B4-BE49-F238E27FC236}">
+                <a16:creationId xmlns:a16="http://schemas.microsoft.com/office/drawing/2014/main" id="{BAAD0516-50F4-E3D2-0330-D19FCE6D6825}"/>
               </a:ext>
             </a:extLst>
           </p:cNvPr>
@@ -5595,8 +5806,8 @@
           <p:nvPr/>
         </p:nvSpPr>
         <p:spPr>
-          <a:xfrm rot="9902016">
-            <a:off x="7667399" y="1186069"/>
+          <a:xfrm rot="10159657">
+            <a:off x="7705107" y="1130568"/>
             <a:ext cx="938713" cy="1930581"/>
           </a:xfrm>
           <a:prstGeom prst="trapezoid">
@@ -5644,32 +5855,33 @@
           </a:p>
         </p:txBody>
       </p:sp>
-      <p:sp>
-        <p:nvSpPr>
-          <p:cNvPr id="77" name="Arc 76">
-            <a:extLst>
-              <a:ext uri="{FF2B5EF4-FFF2-40B4-BE49-F238E27FC236}">
-                <a16:creationId xmlns:a16="http://schemas.microsoft.com/office/drawing/2014/main" id="{D583E65C-D77B-45CE-296E-C8B37BB93AE6}"/>
-              </a:ext>
-            </a:extLst>
-          </p:cNvPr>
-          <p:cNvSpPr/>
+      <p:cxnSp>
+        <p:nvCxnSpPr>
+          <p:cNvPr id="23" name="Straight Arrow Connector 22">
+            <a:extLst>
+              <a:ext uri="{FF2B5EF4-FFF2-40B4-BE49-F238E27FC236}">
+                <a16:creationId xmlns:a16="http://schemas.microsoft.com/office/drawing/2014/main" id="{4C4659B6-2297-3A58-7198-CE56B191E196}"/>
+              </a:ext>
+            </a:extLst>
+          </p:cNvPr>
+          <p:cNvCxnSpPr>
+            <a:cxnSpLocks/>
+          </p:cNvCxnSpPr>
           <p:nvPr/>
-        </p:nvSpPr>
+        </p:nvCxnSpPr>
         <p:spPr>
-          <a:xfrm>
-            <a:off x="7264449" y="1666926"/>
-            <a:ext cx="1487798" cy="2564195"/>
+          <a:xfrm flipV="1">
+            <a:off x="3698706" y="4924940"/>
+            <a:ext cx="0" cy="900418"/>
           </a:xfrm>
-          <a:prstGeom prst="arc">
+          <a:prstGeom prst="straightConnector1">
             <a:avLst/>
           </a:prstGeom>
-          <a:ln w="38100">
+          <a:ln w="57150">
             <a:solidFill>
               <a:schemeClr val="tx1"/>
             </a:solidFill>
-            <a:prstDash val="dash"/>
-            <a:headEnd type="triangle"/>
+            <a:tailEnd type="triangle"/>
           </a:ln>
         </p:spPr>
         <p:style>
@@ -5686,91 +5898,227 @@
             <a:schemeClr val="tx1"/>
           </a:fontRef>
         </p:style>
-        <p:txBody>
-          <a:bodyPr rtlCol="0" anchor="ctr"/>
-          <a:lstStyle/>
-          <a:p>
-            <a:pPr algn="ctr"/>
-            <a:endParaRPr lang="en-US"/>
-          </a:p>
-        </p:txBody>
-      </p:sp>
-      <p:sp>
-        <p:nvSpPr>
-          <p:cNvPr id="117" name="TextBox 116">
-            <a:extLst>
-              <a:ext uri="{FF2B5EF4-FFF2-40B4-BE49-F238E27FC236}">
-                <a16:creationId xmlns:a16="http://schemas.microsoft.com/office/drawing/2014/main" id="{F20F6172-107A-4A71-C057-FD76D2B2E1D8}"/>
-              </a:ext>
-            </a:extLst>
-          </p:cNvPr>
-          <p:cNvSpPr txBox="1"/>
+      </p:cxnSp>
+      <p:cxnSp>
+        <p:nvCxnSpPr>
+          <p:cNvPr id="25" name="Straight Arrow Connector 24">
+            <a:extLst>
+              <a:ext uri="{FF2B5EF4-FFF2-40B4-BE49-F238E27FC236}">
+                <a16:creationId xmlns:a16="http://schemas.microsoft.com/office/drawing/2014/main" id="{8DC92D6D-D143-4AD4-3623-9E74B1071630}"/>
+              </a:ext>
+            </a:extLst>
+          </p:cNvPr>
+          <p:cNvCxnSpPr>
+            <a:cxnSpLocks/>
+          </p:cNvCxnSpPr>
           <p:nvPr/>
-        </p:nvSpPr>
+        </p:nvCxnSpPr>
         <p:spPr>
-          <a:xfrm>
-            <a:off x="1966476" y="6104684"/>
-            <a:ext cx="898003" cy="707886"/>
+          <a:xfrm flipV="1">
+            <a:off x="1158156" y="4924940"/>
+            <a:ext cx="0" cy="900418"/>
           </a:xfrm>
-          <a:prstGeom prst="rect">
+          <a:prstGeom prst="straightConnector1">
             <a:avLst/>
           </a:prstGeom>
-          <a:noFill/>
+          <a:ln w="57150">
+            <a:solidFill>
+              <a:schemeClr val="tx1"/>
+            </a:solidFill>
+            <a:tailEnd type="triangle"/>
+          </a:ln>
         </p:spPr>
-        <p:txBody>
-          <a:bodyPr wrap="none" rtlCol="0">
-            <a:spAutoFit/>
-          </a:bodyPr>
-          <a:lstStyle/>
-          <a:p>
-            <a:r>
-              <a:rPr lang="en-US" sz="4000" dirty="0">
-                <a:latin typeface="Times New Roman" panose="02020603050405020304" pitchFamily="18" charset="0"/>
-                <a:cs typeface="Times New Roman" panose="02020603050405020304" pitchFamily="18" charset="0"/>
-              </a:rPr>
-              <a:t>(A)</a:t>
-            </a:r>
-          </a:p>
-        </p:txBody>
-      </p:sp>
-      <p:sp>
-        <p:nvSpPr>
-          <p:cNvPr id="119" name="TextBox 118">
-            <a:extLst>
-              <a:ext uri="{FF2B5EF4-FFF2-40B4-BE49-F238E27FC236}">
-                <a16:creationId xmlns:a16="http://schemas.microsoft.com/office/drawing/2014/main" id="{6B8B0E45-8EE6-49E0-2E6B-8F8FDDC0B3DF}"/>
-              </a:ext>
-            </a:extLst>
-          </p:cNvPr>
-          <p:cNvSpPr txBox="1"/>
+        <p:style>
+          <a:lnRef idx="2">
+            <a:schemeClr val="accent1"/>
+          </a:lnRef>
+          <a:fillRef idx="0">
+            <a:schemeClr val="accent1"/>
+          </a:fillRef>
+          <a:effectRef idx="1">
+            <a:schemeClr val="accent1"/>
+          </a:effectRef>
+          <a:fontRef idx="minor">
+            <a:schemeClr val="tx1"/>
+          </a:fontRef>
+        </p:style>
+      </p:cxnSp>
+      <p:cxnSp>
+        <p:nvCxnSpPr>
+          <p:cNvPr id="29" name="Straight Arrow Connector 28">
+            <a:extLst>
+              <a:ext uri="{FF2B5EF4-FFF2-40B4-BE49-F238E27FC236}">
+                <a16:creationId xmlns:a16="http://schemas.microsoft.com/office/drawing/2014/main" id="{F31BDEED-637D-A860-159F-7C39C5444C1F}"/>
+              </a:ext>
+            </a:extLst>
+          </p:cNvPr>
+          <p:cNvCxnSpPr>
+            <a:cxnSpLocks/>
+          </p:cNvCxnSpPr>
           <p:nvPr/>
-        </p:nvSpPr>
+        </p:nvCxnSpPr>
         <p:spPr>
-          <a:xfrm>
-            <a:off x="9093970" y="6118585"/>
-            <a:ext cx="869149" cy="707886"/>
+          <a:xfrm flipH="1" flipV="1">
+            <a:off x="10185976" y="4386614"/>
+            <a:ext cx="173954" cy="813545"/>
           </a:xfrm>
-          <a:prstGeom prst="rect">
+          <a:prstGeom prst="straightConnector1">
             <a:avLst/>
           </a:prstGeom>
-          <a:noFill/>
+          <a:ln w="57150">
+            <a:solidFill>
+              <a:schemeClr val="tx1"/>
+            </a:solidFill>
+            <a:tailEnd type="triangle"/>
+          </a:ln>
         </p:spPr>
-        <p:txBody>
-          <a:bodyPr wrap="none" rtlCol="0">
-            <a:spAutoFit/>
-          </a:bodyPr>
-          <a:lstStyle/>
-          <a:p>
-            <a:r>
-              <a:rPr lang="en-US" sz="4000" dirty="0">
-                <a:latin typeface="Times New Roman" panose="02020603050405020304" pitchFamily="18" charset="0"/>
-                <a:cs typeface="Times New Roman" panose="02020603050405020304" pitchFamily="18" charset="0"/>
-              </a:rPr>
-              <a:t>(B)</a:t>
-            </a:r>
-          </a:p>
-        </p:txBody>
-      </p:sp>
+        <p:style>
+          <a:lnRef idx="2">
+            <a:schemeClr val="accent1"/>
+          </a:lnRef>
+          <a:fillRef idx="0">
+            <a:schemeClr val="accent1"/>
+          </a:fillRef>
+          <a:effectRef idx="1">
+            <a:schemeClr val="accent1"/>
+          </a:effectRef>
+          <a:fontRef idx="minor">
+            <a:schemeClr val="tx1"/>
+          </a:fontRef>
+        </p:style>
+      </p:cxnSp>
+      <p:cxnSp>
+        <p:nvCxnSpPr>
+          <p:cNvPr id="35" name="Straight Arrow Connector 34">
+            <a:extLst>
+              <a:ext uri="{FF2B5EF4-FFF2-40B4-BE49-F238E27FC236}">
+                <a16:creationId xmlns:a16="http://schemas.microsoft.com/office/drawing/2014/main" id="{A9F9145E-4AAE-A8C2-D858-E0A86271FA1B}"/>
+              </a:ext>
+            </a:extLst>
+          </p:cNvPr>
+          <p:cNvCxnSpPr>
+            <a:cxnSpLocks/>
+          </p:cNvCxnSpPr>
+          <p:nvPr/>
+        </p:nvCxnSpPr>
+        <p:spPr>
+          <a:xfrm flipH="1" flipV="1">
+            <a:off x="10390266" y="4521571"/>
+            <a:ext cx="173954" cy="813545"/>
+          </a:xfrm>
+          <a:prstGeom prst="straightConnector1">
+            <a:avLst/>
+          </a:prstGeom>
+          <a:ln w="57150">
+            <a:solidFill>
+              <a:schemeClr val="tx1"/>
+            </a:solidFill>
+            <a:tailEnd type="triangle"/>
+          </a:ln>
+        </p:spPr>
+        <p:style>
+          <a:lnRef idx="2">
+            <a:schemeClr val="accent1"/>
+          </a:lnRef>
+          <a:fillRef idx="0">
+            <a:schemeClr val="accent1"/>
+          </a:fillRef>
+          <a:effectRef idx="1">
+            <a:schemeClr val="accent1"/>
+          </a:effectRef>
+          <a:fontRef idx="minor">
+            <a:schemeClr val="tx1"/>
+          </a:fontRef>
+        </p:style>
+      </p:cxnSp>
+      <p:cxnSp>
+        <p:nvCxnSpPr>
+          <p:cNvPr id="38" name="Straight Arrow Connector 37">
+            <a:extLst>
+              <a:ext uri="{FF2B5EF4-FFF2-40B4-BE49-F238E27FC236}">
+                <a16:creationId xmlns:a16="http://schemas.microsoft.com/office/drawing/2014/main" id="{51A689B1-497B-20A4-51D7-38477E36F47D}"/>
+              </a:ext>
+            </a:extLst>
+          </p:cNvPr>
+          <p:cNvCxnSpPr>
+            <a:cxnSpLocks/>
+          </p:cNvCxnSpPr>
+          <p:nvPr/>
+        </p:nvCxnSpPr>
+        <p:spPr>
+          <a:xfrm flipH="1" flipV="1">
+            <a:off x="7898721" y="4712166"/>
+            <a:ext cx="173954" cy="813545"/>
+          </a:xfrm>
+          <a:prstGeom prst="straightConnector1">
+            <a:avLst/>
+          </a:prstGeom>
+          <a:ln w="12700">
+            <a:solidFill>
+              <a:schemeClr val="tx1"/>
+            </a:solidFill>
+            <a:tailEnd type="triangle"/>
+          </a:ln>
+        </p:spPr>
+        <p:style>
+          <a:lnRef idx="2">
+            <a:schemeClr val="accent1"/>
+          </a:lnRef>
+          <a:fillRef idx="0">
+            <a:schemeClr val="accent1"/>
+          </a:fillRef>
+          <a:effectRef idx="1">
+            <a:schemeClr val="accent1"/>
+          </a:effectRef>
+          <a:fontRef idx="minor">
+            <a:schemeClr val="tx1"/>
+          </a:fontRef>
+        </p:style>
+      </p:cxnSp>
+      <p:cxnSp>
+        <p:nvCxnSpPr>
+          <p:cNvPr id="39" name="Straight Arrow Connector 38">
+            <a:extLst>
+              <a:ext uri="{FF2B5EF4-FFF2-40B4-BE49-F238E27FC236}">
+                <a16:creationId xmlns:a16="http://schemas.microsoft.com/office/drawing/2014/main" id="{D07F3225-8B17-080B-2CB8-A6272990C4B0}"/>
+              </a:ext>
+            </a:extLst>
+          </p:cNvPr>
+          <p:cNvCxnSpPr>
+            <a:cxnSpLocks/>
+          </p:cNvCxnSpPr>
+          <p:nvPr/>
+        </p:nvCxnSpPr>
+        <p:spPr>
+          <a:xfrm flipH="1" flipV="1">
+            <a:off x="8057291" y="4847123"/>
+            <a:ext cx="173954" cy="813545"/>
+          </a:xfrm>
+          <a:prstGeom prst="straightConnector1">
+            <a:avLst/>
+          </a:prstGeom>
+          <a:ln w="12700">
+            <a:solidFill>
+              <a:schemeClr val="tx1"/>
+            </a:solidFill>
+            <a:tailEnd type="triangle"/>
+          </a:ln>
+        </p:spPr>
+        <p:style>
+          <a:lnRef idx="2">
+            <a:schemeClr val="accent1"/>
+          </a:lnRef>
+          <a:fillRef idx="0">
+            <a:schemeClr val="accent1"/>
+          </a:fillRef>
+          <a:effectRef idx="1">
+            <a:schemeClr val="accent1"/>
+          </a:effectRef>
+          <a:fontRef idx="minor">
+            <a:schemeClr val="tx1"/>
+          </a:fontRef>
+        </p:style>
+      </p:cxnSp>
     </p:spTree>
     <p:extLst>
       <p:ext uri="{BB962C8B-B14F-4D97-AF65-F5344CB8AC3E}">
